--- a/presentacion.pptx
+++ b/presentacion.pptx
@@ -16927,6 +16927,61 @@
           </a:p>
         </p:txBody>
       </p:sp>
+      <p:sp>
+        <p:nvSpPr>
+          <p:cNvPr id="94" name="CuadroTexto 93">
+            <a:hlinkClick r:id="rId10"/>
+            <a:extLst>
+              <a:ext uri="{FF2B5EF4-FFF2-40B4-BE49-F238E27FC236}">
+                <a16:creationId xmlns:a16="http://schemas.microsoft.com/office/drawing/2014/main" id="{6BE8C26A-E813-9B29-5D3C-EC64F24D64B1}"/>
+              </a:ext>
+            </a:extLst>
+          </p:cNvPr>
+          <p:cNvSpPr txBox="1"/>
+          <p:nvPr/>
+        </p:nvSpPr>
+        <p:spPr>
+          <a:xfrm>
+            <a:off x="2898718" y="3985165"/>
+            <a:ext cx="1334883" cy="261610"/>
+          </a:xfrm>
+          <a:prstGeom prst="rect">
+            <a:avLst/>
+          </a:prstGeom>
+          <a:noFill/>
+        </p:spPr>
+        <p:txBody>
+          <a:bodyPr wrap="square">
+            <a:spAutoFit/>
+          </a:bodyPr>
+          <a:lstStyle/>
+          <a:p>
+            <a:pPr marL="0" indent="0" algn="ctr">
+              <a:buNone/>
+            </a:pPr>
+            <a:r>
+              <a:rPr lang="es-UY" sz="1050" dirty="0">
+                <a:solidFill>
+                  <a:schemeClr val="accent3"/>
+                </a:solidFill>
+                <a:hlinkClick r:id="rId12">
+                  <a:extLst>
+                    <a:ext uri="{A12FA001-AC4F-418D-AE19-62706E023703}">
+                      <ahyp:hlinkClr xmlns:ahyp="http://schemas.microsoft.com/office/drawing/2018/hyperlinkcolor" val="tx"/>
+                    </a:ext>
+                  </a:extLst>
+                </a:hlinkClick>
+              </a:rPr>
+              <a:t>Video de ejemplo</a:t>
+            </a:r>
+            <a:endParaRPr lang="es-419" sz="1050" noProof="0" dirty="0">
+              <a:solidFill>
+                <a:schemeClr val="accent3"/>
+              </a:solidFill>
+            </a:endParaRPr>
+          </a:p>
+        </p:txBody>
+      </p:sp>
     </p:spTree>
     <p:extLst>
       <p:ext uri="{BB962C8B-B14F-4D97-AF65-F5344CB8AC3E}">

--- a/presentacion.pptx
+++ b/presentacion.pptx
@@ -5,7 +5,7 @@
     <p:sldMasterId id="2147483648" r:id="rId1"/>
   </p:sldMasterIdLst>
   <p:notesMasterIdLst>
-    <p:notesMasterId r:id="rId19"/>
+    <p:notesMasterId r:id="rId20"/>
   </p:notesMasterIdLst>
   <p:sldIdLst>
     <p:sldId id="264" r:id="rId2"/>
@@ -17,14 +17,15 @@
     <p:sldId id="268" r:id="rId8"/>
     <p:sldId id="274" r:id="rId9"/>
     <p:sldId id="277" r:id="rId10"/>
-    <p:sldId id="261" r:id="rId11"/>
-    <p:sldId id="262" r:id="rId12"/>
-    <p:sldId id="278" r:id="rId13"/>
-    <p:sldId id="271" r:id="rId14"/>
-    <p:sldId id="273" r:id="rId15"/>
-    <p:sldId id="272" r:id="rId16"/>
-    <p:sldId id="263" r:id="rId17"/>
+    <p:sldId id="280" r:id="rId11"/>
+    <p:sldId id="261" r:id="rId12"/>
+    <p:sldId id="262" r:id="rId13"/>
+    <p:sldId id="278" r:id="rId14"/>
+    <p:sldId id="271" r:id="rId15"/>
+    <p:sldId id="273" r:id="rId16"/>
+    <p:sldId id="272" r:id="rId17"/>
     <p:sldId id="279" r:id="rId18"/>
+    <p:sldId id="263" r:id="rId19"/>
   </p:sldIdLst>
   <p:sldSz cx="9144000" cy="5143500" type="screen16x9"/>
   <p:notesSz cx="5143500" cy="9144000"/>
@@ -464,6 +465,97 @@
   <p:cSld>
     <p:spTree>
       <p:nvGrpSpPr>
+        <p:cNvPr id="1" name=""/>
+        <p:cNvGrpSpPr/>
+        <p:nvPr/>
+      </p:nvGrpSpPr>
+      <p:grpSpPr>
+        <a:xfrm>
+          <a:off x="0" y="0"/>
+          <a:ext cx="0" cy="0"/>
+          <a:chOff x="0" y="0"/>
+          <a:chExt cx="0" cy="0"/>
+        </a:xfrm>
+      </p:grpSpPr>
+      <p:sp>
+        <p:nvSpPr>
+          <p:cNvPr id="2" name="Slide Image Placeholder 1"/>
+          <p:cNvSpPr>
+            <a:spLocks noGrp="1" noRot="1" noChangeAspect="1"/>
+          </p:cNvSpPr>
+          <p:nvPr>
+            <p:ph type="sldImg"/>
+          </p:nvPr>
+        </p:nvSpPr>
+        <p:spPr/>
+        <p:txBody>
+          <a:bodyPr/>
+          <a:lstStyle/>
+          <a:p>
+            <a:endParaRPr lang="es-419"/>
+          </a:p>
+        </p:txBody>
+      </p:sp>
+      <p:sp>
+        <p:nvSpPr>
+          <p:cNvPr id="3" name="Notes Placeholder 2"/>
+          <p:cNvSpPr>
+            <a:spLocks noGrp="1"/>
+          </p:cNvSpPr>
+          <p:nvPr>
+            <p:ph type="body" idx="1"/>
+          </p:nvPr>
+        </p:nvSpPr>
+        <p:spPr/>
+        <p:txBody>
+          <a:bodyPr/>
+          <a:lstStyle/>
+          <a:p>
+            <a:endParaRPr lang="en-US" dirty="0"/>
+          </a:p>
+        </p:txBody>
+      </p:sp>
+      <p:sp>
+        <p:nvSpPr>
+          <p:cNvPr id="4" name="Slide Number Placeholder 3"/>
+          <p:cNvSpPr>
+            <a:spLocks noGrp="1"/>
+          </p:cNvSpPr>
+          <p:nvPr>
+            <p:ph type="sldNum" sz="quarter" idx="10"/>
+          </p:nvPr>
+        </p:nvSpPr>
+        <p:spPr/>
+        <p:txBody>
+          <a:bodyPr/>
+          <a:lstStyle/>
+          <a:p>
+            <a:fld id="{F7021451-1387-4CA6-816F-3879F97B5CBC}" type="slidenum">
+              <a:rPr lang="en-US"/>
+              <a:t>12</a:t>
+            </a:fld>
+            <a:endParaRPr lang="en-US"/>
+          </a:p>
+        </p:txBody>
+      </p:sp>
+    </p:spTree>
+    <p:extLst>
+      <p:ext uri="{BB962C8B-B14F-4D97-AF65-F5344CB8AC3E}">
+        <p14:creationId xmlns:p14="http://schemas.microsoft.com/office/powerpoint/2010/main" val="1024086991"/>
+      </p:ext>
+    </p:extLst>
+  </p:cSld>
+  <p:clrMapOvr>
+    <a:masterClrMapping/>
+  </p:clrMapOvr>
+</p:notes>
+</file>
+
+<file path=ppt/notesSlides/notesSlide12.xml><?xml version="1.0" encoding="utf-8"?>
+<p:notes xmlns:a="http://schemas.openxmlformats.org/drawingml/2006/main" xmlns:r="http://schemas.openxmlformats.org/officeDocument/2006/relationships" xmlns:p="http://schemas.openxmlformats.org/presentationml/2006/main">
+  <p:cSld>
+    <p:spTree>
+      <p:nvGrpSpPr>
         <p:cNvPr id="1" name="">
           <a:extLst>
             <a:ext uri="{FF2B5EF4-FFF2-40B4-BE49-F238E27FC236}">
@@ -555,7 +647,7 @@
           <a:p>
             <a:fld id="{F7021451-1387-4CA6-816F-3879F97B5CBC}" type="slidenum">
               <a:rPr lang="en-US"/>
-              <a:t>12</a:t>
+              <a:t>13</a:t>
             </a:fld>
             <a:endParaRPr lang="en-US"/>
           </a:p>
@@ -574,7 +666,7 @@
 </p:notes>
 </file>
 
-<file path=ppt/notesSlides/notesSlide12.xml><?xml version="1.0" encoding="utf-8"?>
+<file path=ppt/notesSlides/notesSlide13.xml><?xml version="1.0" encoding="utf-8"?>
 <p:notes xmlns:a="http://schemas.openxmlformats.org/drawingml/2006/main" xmlns:r="http://schemas.openxmlformats.org/officeDocument/2006/relationships" xmlns:p="http://schemas.openxmlformats.org/presentationml/2006/main">
   <p:cSld>
     <p:spTree>
@@ -670,7 +762,7 @@
           <a:p>
             <a:fld id="{F7021451-1387-4CA6-816F-3879F97B5CBC}" type="slidenum">
               <a:rPr lang="en-US"/>
-              <a:t>13</a:t>
+              <a:t>14</a:t>
             </a:fld>
             <a:endParaRPr lang="en-US"/>
           </a:p>
@@ -689,7 +781,7 @@
 </p:notes>
 </file>
 
-<file path=ppt/notesSlides/notesSlide13.xml><?xml version="1.0" encoding="utf-8"?>
+<file path=ppt/notesSlides/notesSlide14.xml><?xml version="1.0" encoding="utf-8"?>
 <p:notes xmlns:a="http://schemas.openxmlformats.org/drawingml/2006/main" xmlns:r="http://schemas.openxmlformats.org/officeDocument/2006/relationships" xmlns:p="http://schemas.openxmlformats.org/presentationml/2006/main">
   <p:cSld>
     <p:spTree>
@@ -785,7 +877,7 @@
           <a:p>
             <a:fld id="{F7021451-1387-4CA6-816F-3879F97B5CBC}" type="slidenum">
               <a:rPr lang="en-US"/>
-              <a:t>14</a:t>
+              <a:t>15</a:t>
             </a:fld>
             <a:endParaRPr lang="en-US"/>
           </a:p>
@@ -804,7 +896,7 @@
 </p:notes>
 </file>
 
-<file path=ppt/notesSlides/notesSlide14.xml><?xml version="1.0" encoding="utf-8"?>
+<file path=ppt/notesSlides/notesSlide15.xml><?xml version="1.0" encoding="utf-8"?>
 <p:notes xmlns:a="http://schemas.openxmlformats.org/drawingml/2006/main" xmlns:r="http://schemas.openxmlformats.org/officeDocument/2006/relationships" xmlns:p="http://schemas.openxmlformats.org/presentationml/2006/main">
   <p:cSld>
     <p:spTree>
@@ -900,7 +992,7 @@
           <a:p>
             <a:fld id="{F7021451-1387-4CA6-816F-3879F97B5CBC}" type="slidenum">
               <a:rPr lang="en-US"/>
-              <a:t>15</a:t>
+              <a:t>16</a:t>
             </a:fld>
             <a:endParaRPr lang="en-US"/>
           </a:p>
@@ -910,97 +1002,6 @@
     <p:extLst>
       <p:ext uri="{BB962C8B-B14F-4D97-AF65-F5344CB8AC3E}">
         <p14:creationId xmlns:p14="http://schemas.microsoft.com/office/powerpoint/2010/main" val="1003134769"/>
-      </p:ext>
-    </p:extLst>
-  </p:cSld>
-  <p:clrMapOvr>
-    <a:masterClrMapping/>
-  </p:clrMapOvr>
-</p:notes>
-</file>
-
-<file path=ppt/notesSlides/notesSlide15.xml><?xml version="1.0" encoding="utf-8"?>
-<p:notes xmlns:a="http://schemas.openxmlformats.org/drawingml/2006/main" xmlns:r="http://schemas.openxmlformats.org/officeDocument/2006/relationships" xmlns:p="http://schemas.openxmlformats.org/presentationml/2006/main">
-  <p:cSld>
-    <p:spTree>
-      <p:nvGrpSpPr>
-        <p:cNvPr id="1" name=""/>
-        <p:cNvGrpSpPr/>
-        <p:nvPr/>
-      </p:nvGrpSpPr>
-      <p:grpSpPr>
-        <a:xfrm>
-          <a:off x="0" y="0"/>
-          <a:ext cx="0" cy="0"/>
-          <a:chOff x="0" y="0"/>
-          <a:chExt cx="0" cy="0"/>
-        </a:xfrm>
-      </p:grpSpPr>
-      <p:sp>
-        <p:nvSpPr>
-          <p:cNvPr id="2" name="Slide Image Placeholder 1"/>
-          <p:cNvSpPr>
-            <a:spLocks noGrp="1" noRot="1" noChangeAspect="1"/>
-          </p:cNvSpPr>
-          <p:nvPr>
-            <p:ph type="sldImg"/>
-          </p:nvPr>
-        </p:nvSpPr>
-        <p:spPr/>
-        <p:txBody>
-          <a:bodyPr/>
-          <a:lstStyle/>
-          <a:p>
-            <a:endParaRPr lang="es-419"/>
-          </a:p>
-        </p:txBody>
-      </p:sp>
-      <p:sp>
-        <p:nvSpPr>
-          <p:cNvPr id="3" name="Notes Placeholder 2"/>
-          <p:cNvSpPr>
-            <a:spLocks noGrp="1"/>
-          </p:cNvSpPr>
-          <p:nvPr>
-            <p:ph type="body" idx="1"/>
-          </p:nvPr>
-        </p:nvSpPr>
-        <p:spPr/>
-        <p:txBody>
-          <a:bodyPr/>
-          <a:lstStyle/>
-          <a:p>
-            <a:endParaRPr lang="en-US" dirty="0"/>
-          </a:p>
-        </p:txBody>
-      </p:sp>
-      <p:sp>
-        <p:nvSpPr>
-          <p:cNvPr id="4" name="Slide Number Placeholder 3"/>
-          <p:cNvSpPr>
-            <a:spLocks noGrp="1"/>
-          </p:cNvSpPr>
-          <p:nvPr>
-            <p:ph type="sldNum" sz="quarter" idx="10"/>
-          </p:nvPr>
-        </p:nvSpPr>
-        <p:spPr/>
-        <p:txBody>
-          <a:bodyPr/>
-          <a:lstStyle/>
-          <a:p>
-            <a:fld id="{F7021451-1387-4CA6-816F-3879F97B5CBC}" type="slidenum">
-              <a:rPr lang="en-US"/>
-              <a:t>16</a:t>
-            </a:fld>
-            <a:endParaRPr lang="en-US"/>
-          </a:p>
-        </p:txBody>
-      </p:sp>
-    </p:spTree>
-    <p:extLst>
-      <p:ext uri="{BB962C8B-B14F-4D97-AF65-F5344CB8AC3E}">
-        <p14:creationId xmlns:p14="http://schemas.microsoft.com/office/powerpoint/2010/main" val="1024086991"/>
       </p:ext>
     </p:extLst>
   </p:cSld>
@@ -1116,6 +1117,97 @@
     <p:extLst>
       <p:ext uri="{BB962C8B-B14F-4D97-AF65-F5344CB8AC3E}">
         <p14:creationId xmlns:p14="http://schemas.microsoft.com/office/powerpoint/2010/main" val="3678417366"/>
+      </p:ext>
+    </p:extLst>
+  </p:cSld>
+  <p:clrMapOvr>
+    <a:masterClrMapping/>
+  </p:clrMapOvr>
+</p:notes>
+</file>
+
+<file path=ppt/notesSlides/notesSlide17.xml><?xml version="1.0" encoding="utf-8"?>
+<p:notes xmlns:a="http://schemas.openxmlformats.org/drawingml/2006/main" xmlns:r="http://schemas.openxmlformats.org/officeDocument/2006/relationships" xmlns:p="http://schemas.openxmlformats.org/presentationml/2006/main">
+  <p:cSld>
+    <p:spTree>
+      <p:nvGrpSpPr>
+        <p:cNvPr id="1" name=""/>
+        <p:cNvGrpSpPr/>
+        <p:nvPr/>
+      </p:nvGrpSpPr>
+      <p:grpSpPr>
+        <a:xfrm>
+          <a:off x="0" y="0"/>
+          <a:ext cx="0" cy="0"/>
+          <a:chOff x="0" y="0"/>
+          <a:chExt cx="0" cy="0"/>
+        </a:xfrm>
+      </p:grpSpPr>
+      <p:sp>
+        <p:nvSpPr>
+          <p:cNvPr id="2" name="Slide Image Placeholder 1"/>
+          <p:cNvSpPr>
+            <a:spLocks noGrp="1" noRot="1" noChangeAspect="1"/>
+          </p:cNvSpPr>
+          <p:nvPr>
+            <p:ph type="sldImg"/>
+          </p:nvPr>
+        </p:nvSpPr>
+        <p:spPr/>
+        <p:txBody>
+          <a:bodyPr/>
+          <a:lstStyle/>
+          <a:p>
+            <a:endParaRPr lang="es-419"/>
+          </a:p>
+        </p:txBody>
+      </p:sp>
+      <p:sp>
+        <p:nvSpPr>
+          <p:cNvPr id="3" name="Notes Placeholder 2"/>
+          <p:cNvSpPr>
+            <a:spLocks noGrp="1"/>
+          </p:cNvSpPr>
+          <p:nvPr>
+            <p:ph type="body" idx="1"/>
+          </p:nvPr>
+        </p:nvSpPr>
+        <p:spPr/>
+        <p:txBody>
+          <a:bodyPr/>
+          <a:lstStyle/>
+          <a:p>
+            <a:endParaRPr lang="en-US" dirty="0"/>
+          </a:p>
+        </p:txBody>
+      </p:sp>
+      <p:sp>
+        <p:nvSpPr>
+          <p:cNvPr id="4" name="Slide Number Placeholder 3"/>
+          <p:cNvSpPr>
+            <a:spLocks noGrp="1"/>
+          </p:cNvSpPr>
+          <p:nvPr>
+            <p:ph type="sldNum" sz="quarter" idx="10"/>
+          </p:nvPr>
+        </p:nvSpPr>
+        <p:spPr/>
+        <p:txBody>
+          <a:bodyPr/>
+          <a:lstStyle/>
+          <a:p>
+            <a:fld id="{F7021451-1387-4CA6-816F-3879F97B5CBC}" type="slidenum">
+              <a:rPr lang="en-US"/>
+              <a:t>18</a:t>
+            </a:fld>
+            <a:endParaRPr lang="en-US"/>
+          </a:p>
+        </p:txBody>
+      </p:sp>
+    </p:spTree>
+    <p:extLst>
+      <p:ext uri="{BB962C8B-B14F-4D97-AF65-F5344CB8AC3E}">
+        <p14:creationId xmlns:p14="http://schemas.microsoft.com/office/powerpoint/2010/main" val="1024086991"/>
       </p:ext>
     </p:extLst>
   </p:cSld>
@@ -1863,7 +1955,13 @@
   <p:cSld>
     <p:spTree>
       <p:nvGrpSpPr>
-        <p:cNvPr id="1" name=""/>
+        <p:cNvPr id="1" name="">
+          <a:extLst>
+            <a:ext uri="{FF2B5EF4-FFF2-40B4-BE49-F238E27FC236}">
+              <a16:creationId xmlns:a16="http://schemas.microsoft.com/office/drawing/2014/main" id="{504E5F15-F56B-C627-19CA-D311070EBADB}"/>
+            </a:ext>
+          </a:extLst>
+        </p:cNvPr>
         <p:cNvGrpSpPr/>
         <p:nvPr/>
       </p:nvGrpSpPr>
@@ -1877,7 +1975,13 @@
       </p:grpSpPr>
       <p:sp>
         <p:nvSpPr>
-          <p:cNvPr id="2" name="Slide Image Placeholder 1"/>
+          <p:cNvPr id="2" name="Slide Image Placeholder 1">
+            <a:extLst>
+              <a:ext uri="{FF2B5EF4-FFF2-40B4-BE49-F238E27FC236}">
+                <a16:creationId xmlns:a16="http://schemas.microsoft.com/office/drawing/2014/main" id="{7C02666F-67CD-6E58-FC64-2C7FA7ED9912}"/>
+              </a:ext>
+            </a:extLst>
+          </p:cNvPr>
           <p:cNvSpPr>
             <a:spLocks noGrp="1" noRot="1" noChangeAspect="1"/>
           </p:cNvSpPr>
@@ -1896,7 +2000,13 @@
       </p:sp>
       <p:sp>
         <p:nvSpPr>
-          <p:cNvPr id="3" name="Notes Placeholder 2"/>
+          <p:cNvPr id="3" name="Notes Placeholder 2">
+            <a:extLst>
+              <a:ext uri="{FF2B5EF4-FFF2-40B4-BE49-F238E27FC236}">
+                <a16:creationId xmlns:a16="http://schemas.microsoft.com/office/drawing/2014/main" id="{6EA6BFE2-AF03-35D2-5D63-FE0411872CC9}"/>
+              </a:ext>
+            </a:extLst>
+          </p:cNvPr>
           <p:cNvSpPr>
             <a:spLocks noGrp="1"/>
           </p:cNvSpPr>
@@ -1915,7 +2025,13 @@
       </p:sp>
       <p:sp>
         <p:nvSpPr>
-          <p:cNvPr id="4" name="Slide Number Placeholder 3"/>
+          <p:cNvPr id="4" name="Slide Number Placeholder 3">
+            <a:extLst>
+              <a:ext uri="{FF2B5EF4-FFF2-40B4-BE49-F238E27FC236}">
+                <a16:creationId xmlns:a16="http://schemas.microsoft.com/office/drawing/2014/main" id="{F3124242-8F0E-7CBD-63F1-3C9BBAEB9186}"/>
+              </a:ext>
+            </a:extLst>
+          </p:cNvPr>
           <p:cNvSpPr>
             <a:spLocks noGrp="1"/>
           </p:cNvSpPr>
@@ -1939,7 +2055,7 @@
     </p:spTree>
     <p:extLst>
       <p:ext uri="{BB962C8B-B14F-4D97-AF65-F5344CB8AC3E}">
-        <p14:creationId xmlns:p14="http://schemas.microsoft.com/office/powerpoint/2010/main" val="1024086991"/>
+        <p14:creationId xmlns:p14="http://schemas.microsoft.com/office/powerpoint/2010/main" val="3081183278"/>
       </p:ext>
     </p:extLst>
   </p:cSld>
@@ -2529,6 +2645,1265 @@
 
 <file path=ppt/slides/slide10.xml><?xml version="1.0" encoding="utf-8"?>
 <p:sld xmlns:a="http://schemas.openxmlformats.org/drawingml/2006/main" xmlns:r="http://schemas.openxmlformats.org/officeDocument/2006/relationships" xmlns:p="http://schemas.openxmlformats.org/presentationml/2006/main">
+  <p:cSld>
+    <p:bg>
+      <p:bgPr>
+        <a:solidFill>
+          <a:srgbClr val="0D1117"/>
+        </a:solidFill>
+        <a:effectLst/>
+      </p:bgPr>
+    </p:bg>
+    <p:spTree>
+      <p:nvGrpSpPr>
+        <p:cNvPr id="1" name="">
+          <a:extLst>
+            <a:ext uri="{FF2B5EF4-FFF2-40B4-BE49-F238E27FC236}">
+              <a16:creationId xmlns:a16="http://schemas.microsoft.com/office/drawing/2014/main" id="{08C3DF3B-D16F-4097-9137-02DDC6A86B98}"/>
+            </a:ext>
+          </a:extLst>
+        </p:cNvPr>
+        <p:cNvGrpSpPr/>
+        <p:nvPr/>
+      </p:nvGrpSpPr>
+      <p:grpSpPr>
+        <a:xfrm>
+          <a:off x="0" y="0"/>
+          <a:ext cx="0" cy="0"/>
+          <a:chOff x="0" y="0"/>
+          <a:chExt cx="0" cy="0"/>
+        </a:xfrm>
+      </p:grpSpPr>
+      <p:sp>
+        <p:nvSpPr>
+          <p:cNvPr id="2" name="Shape 0">
+            <a:extLst>
+              <a:ext uri="{FF2B5EF4-FFF2-40B4-BE49-F238E27FC236}">
+                <a16:creationId xmlns:a16="http://schemas.microsoft.com/office/drawing/2014/main" id="{2FBD4FFE-750F-7D36-DB15-725044E4BB72}"/>
+              </a:ext>
+            </a:extLst>
+          </p:cNvPr>
+          <p:cNvSpPr/>
+          <p:nvPr/>
+        </p:nvSpPr>
+        <p:spPr>
+          <a:xfrm>
+            <a:off x="0" y="0"/>
+            <a:ext cx="9144000" cy="685800"/>
+          </a:xfrm>
+          <a:prstGeom prst="rect">
+            <a:avLst/>
+          </a:prstGeom>
+          <a:solidFill>
+            <a:srgbClr val="161B22"/>
+          </a:solidFill>
+          <a:ln/>
+        </p:spPr>
+        <p:txBody>
+          <a:bodyPr/>
+          <a:lstStyle/>
+          <a:p>
+            <a:endParaRPr lang="es-419" noProof="0" dirty="0"/>
+          </a:p>
+        </p:txBody>
+      </p:sp>
+      <p:sp>
+        <p:nvSpPr>
+          <p:cNvPr id="3" name="Text 1">
+            <a:extLst>
+              <a:ext uri="{FF2B5EF4-FFF2-40B4-BE49-F238E27FC236}">
+                <a16:creationId xmlns:a16="http://schemas.microsoft.com/office/drawing/2014/main" id="{80F3A413-198E-CA42-1628-26C97078CE16}"/>
+              </a:ext>
+            </a:extLst>
+          </p:cNvPr>
+          <p:cNvSpPr/>
+          <p:nvPr/>
+        </p:nvSpPr>
+        <p:spPr>
+          <a:xfrm>
+            <a:off x="365760" y="91440"/>
+            <a:ext cx="8229600" cy="502920"/>
+          </a:xfrm>
+          <a:prstGeom prst="rect">
+            <a:avLst/>
+          </a:prstGeom>
+          <a:noFill/>
+          <a:ln/>
+        </p:spPr>
+        <p:txBody>
+          <a:bodyPr wrap="square" lIns="0" tIns="0" rIns="0" bIns="0" rtlCol="0" anchor="ctr"/>
+          <a:lstStyle/>
+          <a:p>
+            <a:pPr marL="0" indent="0">
+              <a:buNone/>
+            </a:pPr>
+            <a:r>
+              <a:rPr lang="es-UY" sz="1400" noProof="0" dirty="0">
+                <a:solidFill>
+                  <a:srgbClr val="9DBAED"/>
+                </a:solidFill>
+              </a:rPr>
+              <a:t>¿AGENTES?</a:t>
+            </a:r>
+            <a:endParaRPr lang="es-419" sz="1400" noProof="0" dirty="0">
+              <a:solidFill>
+                <a:srgbClr val="9DBAED"/>
+              </a:solidFill>
+            </a:endParaRPr>
+          </a:p>
+        </p:txBody>
+      </p:sp>
+      <p:graphicFrame>
+        <p:nvGraphicFramePr>
+          <p:cNvPr id="4" name="Tabla 3">
+            <a:extLst>
+              <a:ext uri="{FF2B5EF4-FFF2-40B4-BE49-F238E27FC236}">
+                <a16:creationId xmlns:a16="http://schemas.microsoft.com/office/drawing/2014/main" id="{F70104EB-0B36-ADEC-8645-8A1BE3655D96}"/>
+              </a:ext>
+            </a:extLst>
+          </p:cNvPr>
+          <p:cNvGraphicFramePr>
+            <a:graphicFrameLocks noGrp="1"/>
+          </p:cNvGraphicFramePr>
+          <p:nvPr>
+            <p:extLst>
+              <p:ext uri="{D42A27DB-BD31-4B8C-83A1-F6EECF244321}">
+                <p14:modId xmlns:p14="http://schemas.microsoft.com/office/powerpoint/2010/main" val="1373096173"/>
+              </p:ext>
+            </p:extLst>
+          </p:nvPr>
+        </p:nvGraphicFramePr>
+        <p:xfrm>
+          <a:off x="641856" y="1015781"/>
+          <a:ext cx="7692246" cy="3356222"/>
+        </p:xfrm>
+        <a:graphic>
+          <a:graphicData uri="http://schemas.openxmlformats.org/drawingml/2006/table">
+            <a:tbl>
+              <a:tblPr>
+                <a:tableStyleId>{21E4AEA4-8DFA-4A89-87EB-49C32662AFE0}</a:tableStyleId>
+              </a:tblPr>
+              <a:tblGrid>
+                <a:gridCol w="1239195">
+                  <a:extLst>
+                    <a:ext uri="{9D8B030D-6E8A-4147-A177-3AD203B41FA5}">
+                      <a16:colId xmlns:a16="http://schemas.microsoft.com/office/drawing/2014/main" val="1015353113"/>
+                    </a:ext>
+                  </a:extLst>
+                </a:gridCol>
+                <a:gridCol w="3533503">
+                  <a:extLst>
+                    <a:ext uri="{9D8B030D-6E8A-4147-A177-3AD203B41FA5}">
+                      <a16:colId xmlns:a16="http://schemas.microsoft.com/office/drawing/2014/main" val="3422019738"/>
+                    </a:ext>
+                  </a:extLst>
+                </a:gridCol>
+                <a:gridCol w="2919548">
+                  <a:extLst>
+                    <a:ext uri="{9D8B030D-6E8A-4147-A177-3AD203B41FA5}">
+                      <a16:colId xmlns:a16="http://schemas.microsoft.com/office/drawing/2014/main" val="684691091"/>
+                    </a:ext>
+                  </a:extLst>
+                </a:gridCol>
+              </a:tblGrid>
+              <a:tr h="118630">
+                <a:tc>
+                  <a:txBody>
+                    <a:bodyPr/>
+                    <a:lstStyle/>
+                    <a:p>
+                      <a:pPr>
+                        <a:buNone/>
+                      </a:pPr>
+                      <a:endParaRPr lang="es-419" sz="1200" b="1" dirty="0">
+                        <a:solidFill>
+                          <a:schemeClr val="bg1"/>
+                        </a:solidFill>
+                      </a:endParaRPr>
+                    </a:p>
+                  </a:txBody>
+                  <a:tcPr marL="29657" marR="29657" marT="14829" marB="14829" anchor="ctr">
+                    <a:lnL w="12700" cmpd="sng">
+                      <a:noFill/>
+                    </a:lnL>
+                    <a:lnT w="12700" cmpd="sng">
+                      <a:noFill/>
+                    </a:lnT>
+                    <a:solidFill>
+                      <a:srgbClr val="0D1117"/>
+                    </a:solidFill>
+                  </a:tcPr>
+                </a:tc>
+                <a:tc>
+                  <a:txBody>
+                    <a:bodyPr/>
+                    <a:lstStyle/>
+                    <a:p>
+                      <a:pPr>
+                        <a:buNone/>
+                      </a:pPr>
+                      <a:r>
+                        <a:rPr lang="es-MX" sz="1200" b="1">
+                          <a:solidFill>
+                            <a:schemeClr val="bg1"/>
+                          </a:solidFill>
+                        </a:rPr>
+                        <a:t>Agent Mode en el editor</a:t>
+                      </a:r>
+                    </a:p>
+                  </a:txBody>
+                  <a:tcPr marL="29657" marR="29657" marT="14829" marB="14829" anchor="ctr">
+                    <a:solidFill>
+                      <a:srgbClr val="0D1117"/>
+                    </a:solidFill>
+                  </a:tcPr>
+                </a:tc>
+                <a:tc>
+                  <a:txBody>
+                    <a:bodyPr/>
+                    <a:lstStyle/>
+                    <a:p>
+                      <a:pPr>
+                        <a:buNone/>
+                      </a:pPr>
+                      <a:r>
+                        <a:rPr lang="es-419" sz="1200" b="1" dirty="0" err="1">
+                          <a:solidFill>
+                            <a:schemeClr val="bg1"/>
+                          </a:solidFill>
+                        </a:rPr>
+                        <a:t>Copilot</a:t>
+                      </a:r>
+                      <a:r>
+                        <a:rPr lang="es-419" sz="1200" b="1" dirty="0">
+                          <a:solidFill>
+                            <a:schemeClr val="bg1"/>
+                          </a:solidFill>
+                        </a:rPr>
+                        <a:t> Cloud Agent y </a:t>
+                      </a:r>
+                      <a:r>
+                        <a:rPr lang="es-419" sz="1200" b="1" dirty="0" err="1">
+                          <a:solidFill>
+                            <a:schemeClr val="bg1"/>
+                          </a:solidFill>
+                        </a:rPr>
+                        <a:t>custom</a:t>
+                      </a:r>
+                      <a:r>
+                        <a:rPr lang="es-419" sz="1200" b="1" dirty="0">
+                          <a:solidFill>
+                            <a:schemeClr val="bg1"/>
+                          </a:solidFill>
+                        </a:rPr>
+                        <a:t> </a:t>
+                      </a:r>
+                      <a:r>
+                        <a:rPr lang="es-419" sz="1200" b="1" dirty="0" err="1">
+                          <a:solidFill>
+                            <a:schemeClr val="bg1"/>
+                          </a:solidFill>
+                        </a:rPr>
+                        <a:t>agents</a:t>
+                      </a:r>
+                      <a:endParaRPr lang="es-419" sz="1200" b="1" dirty="0">
+                        <a:solidFill>
+                          <a:schemeClr val="bg1"/>
+                        </a:solidFill>
+                      </a:endParaRPr>
+                    </a:p>
+                  </a:txBody>
+                  <a:tcPr marL="29657" marR="29657" marT="14829" marB="14829" anchor="ctr">
+                    <a:solidFill>
+                      <a:srgbClr val="0D1117"/>
+                    </a:solidFill>
+                  </a:tcPr>
+                </a:tc>
+                <a:extLst>
+                  <a:ext uri="{0D108BD9-81ED-4DB2-BD59-A6C34878D82A}">
+                    <a16:rowId xmlns:a16="http://schemas.microsoft.com/office/drawing/2014/main" val="1089320967"/>
+                  </a:ext>
+                </a:extLst>
+              </a:tr>
+              <a:tr h="296574">
+                <a:tc>
+                  <a:txBody>
+                    <a:bodyPr/>
+                    <a:lstStyle/>
+                    <a:p>
+                      <a:pPr>
+                        <a:buNone/>
+                      </a:pPr>
+                      <a:r>
+                        <a:rPr lang="es-419" sz="900" b="1" dirty="0">
+                          <a:solidFill>
+                            <a:schemeClr val="bg1"/>
+                          </a:solidFill>
+                        </a:rPr>
+                        <a:t>Dónde se usa</a:t>
+                      </a:r>
+                      <a:endParaRPr lang="es-419" sz="900" dirty="0">
+                        <a:solidFill>
+                          <a:schemeClr val="bg1"/>
+                        </a:solidFill>
+                      </a:endParaRPr>
+                    </a:p>
+                  </a:txBody>
+                  <a:tcPr marL="29657" marR="29657" marT="14829" marB="14829" anchor="ctr">
+                    <a:solidFill>
+                      <a:srgbClr val="0D1117"/>
+                    </a:solidFill>
+                  </a:tcPr>
+                </a:tc>
+                <a:tc>
+                  <a:txBody>
+                    <a:bodyPr/>
+                    <a:lstStyle/>
+                    <a:p>
+                      <a:pPr>
+                        <a:buNone/>
+                      </a:pPr>
+                      <a:r>
+                        <a:rPr lang="es-MX" sz="900" dirty="0">
+                          <a:solidFill>
+                            <a:schemeClr val="bg1"/>
+                          </a:solidFill>
+                        </a:rPr>
+                        <a:t>En el IDE/editor, por ejemplo VS Code.</a:t>
+                      </a:r>
+                    </a:p>
+                  </a:txBody>
+                  <a:tcPr marL="29657" marR="29657" marT="14829" marB="14829" anchor="ctr">
+                    <a:solidFill>
+                      <a:srgbClr val="0D1117"/>
+                    </a:solidFill>
+                  </a:tcPr>
+                </a:tc>
+                <a:tc>
+                  <a:txBody>
+                    <a:bodyPr/>
+                    <a:lstStyle/>
+                    <a:p>
+                      <a:pPr>
+                        <a:buNone/>
+                      </a:pPr>
+                      <a:r>
+                        <a:rPr lang="es-419" sz="900" dirty="0">
+                          <a:solidFill>
+                            <a:schemeClr val="bg1"/>
+                          </a:solidFill>
+                        </a:rPr>
+                        <a:t>En GitHub, asociado a repositorios, </a:t>
+                      </a:r>
+                      <a:r>
+                        <a:rPr lang="es-419" sz="900" dirty="0" err="1">
+                          <a:solidFill>
+                            <a:schemeClr val="bg1"/>
+                          </a:solidFill>
+                        </a:rPr>
+                        <a:t>issues</a:t>
+                      </a:r>
+                      <a:r>
+                        <a:rPr lang="es-419" sz="900" dirty="0">
+                          <a:solidFill>
+                            <a:schemeClr val="bg1"/>
+                          </a:solidFill>
+                        </a:rPr>
+                        <a:t> o tareas.</a:t>
+                      </a:r>
+                    </a:p>
+                  </a:txBody>
+                  <a:tcPr marL="29657" marR="29657" marT="14829" marB="14829" anchor="ctr">
+                    <a:solidFill>
+                      <a:srgbClr val="0D1117"/>
+                    </a:solidFill>
+                  </a:tcPr>
+                </a:tc>
+                <a:extLst>
+                  <a:ext uri="{0D108BD9-81ED-4DB2-BD59-A6C34878D82A}">
+                    <a16:rowId xmlns:a16="http://schemas.microsoft.com/office/drawing/2014/main" val="4040985210"/>
+                  </a:ext>
+                </a:extLst>
+              </a:tr>
+              <a:tr h="385546">
+                <a:tc>
+                  <a:txBody>
+                    <a:bodyPr/>
+                    <a:lstStyle/>
+                    <a:p>
+                      <a:pPr>
+                        <a:buNone/>
+                      </a:pPr>
+                      <a:r>
+                        <a:rPr lang="es-419" sz="900" b="1" dirty="0">
+                          <a:solidFill>
+                            <a:schemeClr val="bg1"/>
+                          </a:solidFill>
+                        </a:rPr>
+                        <a:t>Dónde trabaja</a:t>
+                      </a:r>
+                      <a:endParaRPr lang="es-419" sz="900" dirty="0">
+                        <a:solidFill>
+                          <a:schemeClr val="bg1"/>
+                        </a:solidFill>
+                      </a:endParaRPr>
+                    </a:p>
+                  </a:txBody>
+                  <a:tcPr marL="29657" marR="29657" marT="14829" marB="14829" anchor="ctr">
+                    <a:solidFill>
+                      <a:srgbClr val="0D1117"/>
+                    </a:solidFill>
+                  </a:tcPr>
+                </a:tc>
+                <a:tc>
+                  <a:txBody>
+                    <a:bodyPr/>
+                    <a:lstStyle/>
+                    <a:p>
+                      <a:pPr>
+                        <a:buNone/>
+                      </a:pPr>
+                      <a:r>
+                        <a:rPr lang="es-MX" sz="900">
+                          <a:solidFill>
+                            <a:schemeClr val="bg1"/>
+                          </a:solidFill>
+                        </a:rPr>
+                        <a:t>En tu entorno local, sobre los archivos que tenés abiertos o en tu workspace.</a:t>
+                      </a:r>
+                    </a:p>
+                  </a:txBody>
+                  <a:tcPr marL="29657" marR="29657" marT="14829" marB="14829" anchor="ctr">
+                    <a:solidFill>
+                      <a:srgbClr val="0D1117"/>
+                    </a:solidFill>
+                  </a:tcPr>
+                </a:tc>
+                <a:tc>
+                  <a:txBody>
+                    <a:bodyPr/>
+                    <a:lstStyle/>
+                    <a:p>
+                      <a:pPr>
+                        <a:buNone/>
+                      </a:pPr>
+                      <a:r>
+                        <a:rPr lang="es-MX" sz="900" dirty="0">
+                          <a:solidFill>
+                            <a:schemeClr val="bg1"/>
+                          </a:solidFill>
+                        </a:rPr>
+                        <a:t>En un entorno en la nube gestionado por GitHub.</a:t>
+                      </a:r>
+                    </a:p>
+                  </a:txBody>
+                  <a:tcPr marL="29657" marR="29657" marT="14829" marB="14829" anchor="ctr">
+                    <a:solidFill>
+                      <a:srgbClr val="0D1117"/>
+                    </a:solidFill>
+                  </a:tcPr>
+                </a:tc>
+                <a:extLst>
+                  <a:ext uri="{0D108BD9-81ED-4DB2-BD59-A6C34878D82A}">
+                    <a16:rowId xmlns:a16="http://schemas.microsoft.com/office/drawing/2014/main" val="3800653963"/>
+                  </a:ext>
+                </a:extLst>
+              </a:tr>
+              <a:tr h="207602">
+                <a:tc>
+                  <a:txBody>
+                    <a:bodyPr/>
+                    <a:lstStyle/>
+                    <a:p>
+                      <a:pPr>
+                        <a:buNone/>
+                      </a:pPr>
+                      <a:r>
+                        <a:rPr lang="es-419" sz="900" b="1">
+                          <a:solidFill>
+                            <a:schemeClr val="bg1"/>
+                          </a:solidFill>
+                        </a:rPr>
+                        <a:t>Interfaz principal</a:t>
+                      </a:r>
+                      <a:endParaRPr lang="es-419" sz="900">
+                        <a:solidFill>
+                          <a:schemeClr val="bg1"/>
+                        </a:solidFill>
+                      </a:endParaRPr>
+                    </a:p>
+                  </a:txBody>
+                  <a:tcPr marL="29657" marR="29657" marT="14829" marB="14829" anchor="ctr">
+                    <a:solidFill>
+                      <a:srgbClr val="0D1117"/>
+                    </a:solidFill>
+                  </a:tcPr>
+                </a:tc>
+                <a:tc>
+                  <a:txBody>
+                    <a:bodyPr/>
+                    <a:lstStyle/>
+                    <a:p>
+                      <a:pPr>
+                        <a:buNone/>
+                      </a:pPr>
+                      <a:r>
+                        <a:rPr lang="es-419" sz="900" dirty="0" err="1">
+                          <a:solidFill>
+                            <a:schemeClr val="bg1"/>
+                          </a:solidFill>
+                        </a:rPr>
+                        <a:t>Copilot</a:t>
+                      </a:r>
+                      <a:r>
+                        <a:rPr lang="es-419" sz="900" dirty="0">
+                          <a:solidFill>
+                            <a:schemeClr val="bg1"/>
+                          </a:solidFill>
+                        </a:rPr>
+                        <a:t> Chat dentro del editor.</a:t>
+                      </a:r>
+                    </a:p>
+                  </a:txBody>
+                  <a:tcPr marL="29657" marR="29657" marT="14829" marB="14829" anchor="ctr">
+                    <a:solidFill>
+                      <a:srgbClr val="0D1117"/>
+                    </a:solidFill>
+                  </a:tcPr>
+                </a:tc>
+                <a:tc>
+                  <a:txBody>
+                    <a:bodyPr/>
+                    <a:lstStyle/>
+                    <a:p>
+                      <a:pPr>
+                        <a:buNone/>
+                      </a:pPr>
+                      <a:r>
+                        <a:rPr lang="en-US" sz="900">
+                          <a:solidFill>
+                            <a:schemeClr val="bg1"/>
+                          </a:solidFill>
+                        </a:rPr>
+                        <a:t>GitHub.com / Copilot en GitHub / issues / tareas.</a:t>
+                      </a:r>
+                    </a:p>
+                  </a:txBody>
+                  <a:tcPr marL="29657" marR="29657" marT="14829" marB="14829" anchor="ctr">
+                    <a:solidFill>
+                      <a:srgbClr val="0D1117"/>
+                    </a:solidFill>
+                  </a:tcPr>
+                </a:tc>
+                <a:extLst>
+                  <a:ext uri="{0D108BD9-81ED-4DB2-BD59-A6C34878D82A}">
+                    <a16:rowId xmlns:a16="http://schemas.microsoft.com/office/drawing/2014/main" val="3784013863"/>
+                  </a:ext>
+                </a:extLst>
+              </a:tr>
+              <a:tr h="385546">
+                <a:tc>
+                  <a:txBody>
+                    <a:bodyPr/>
+                    <a:lstStyle/>
+                    <a:p>
+                      <a:pPr>
+                        <a:buNone/>
+                      </a:pPr>
+                      <a:r>
+                        <a:rPr lang="es-419" sz="900" b="1">
+                          <a:solidFill>
+                            <a:schemeClr val="bg1"/>
+                          </a:solidFill>
+                        </a:rPr>
+                        <a:t>Nivel de autonomía</a:t>
+                      </a:r>
+                      <a:endParaRPr lang="es-419" sz="900">
+                        <a:solidFill>
+                          <a:schemeClr val="bg1"/>
+                        </a:solidFill>
+                      </a:endParaRPr>
+                    </a:p>
+                  </a:txBody>
+                  <a:tcPr marL="29657" marR="29657" marT="14829" marB="14829" anchor="ctr">
+                    <a:solidFill>
+                      <a:srgbClr val="0D1117"/>
+                    </a:solidFill>
+                  </a:tcPr>
+                </a:tc>
+                <a:tc>
+                  <a:txBody>
+                    <a:bodyPr/>
+                    <a:lstStyle/>
+                    <a:p>
+                      <a:pPr>
+                        <a:buNone/>
+                      </a:pPr>
+                      <a:r>
+                        <a:rPr lang="es-MX" sz="900" dirty="0">
+                          <a:solidFill>
+                            <a:schemeClr val="bg1"/>
+                          </a:solidFill>
+                        </a:rPr>
+                        <a:t>Más autónomo que el chat normal, pero vos lo </a:t>
+                      </a:r>
+                      <a:r>
+                        <a:rPr lang="es-MX" sz="900" dirty="0" err="1">
+                          <a:solidFill>
+                            <a:schemeClr val="bg1"/>
+                          </a:solidFill>
+                        </a:rPr>
+                        <a:t>supervisás</a:t>
+                      </a:r>
+                      <a:r>
+                        <a:rPr lang="es-MX" sz="900" dirty="0">
+                          <a:solidFill>
+                            <a:schemeClr val="bg1"/>
+                          </a:solidFill>
+                        </a:rPr>
+                        <a:t> muy de cerca en el editor.</a:t>
+                      </a:r>
+                    </a:p>
+                  </a:txBody>
+                  <a:tcPr marL="29657" marR="29657" marT="14829" marB="14829" anchor="ctr">
+                    <a:solidFill>
+                      <a:srgbClr val="0D1117"/>
+                    </a:solidFill>
+                  </a:tcPr>
+                </a:tc>
+                <a:tc>
+                  <a:txBody>
+                    <a:bodyPr/>
+                    <a:lstStyle/>
+                    <a:p>
+                      <a:pPr>
+                        <a:buNone/>
+                      </a:pPr>
+                      <a:r>
+                        <a:rPr lang="es-MX" sz="900">
+                          <a:solidFill>
+                            <a:schemeClr val="bg1"/>
+                          </a:solidFill>
+                        </a:rPr>
+                        <a:t>Más autónomo: puede trabajar una tarea completa en la nube.</a:t>
+                      </a:r>
+                    </a:p>
+                  </a:txBody>
+                  <a:tcPr marL="29657" marR="29657" marT="14829" marB="14829" anchor="ctr">
+                    <a:solidFill>
+                      <a:srgbClr val="0D1117"/>
+                    </a:solidFill>
+                  </a:tcPr>
+                </a:tc>
+                <a:extLst>
+                  <a:ext uri="{0D108BD9-81ED-4DB2-BD59-A6C34878D82A}">
+                    <a16:rowId xmlns:a16="http://schemas.microsoft.com/office/drawing/2014/main" val="126741237"/>
+                  </a:ext>
+                </a:extLst>
+              </a:tr>
+              <a:tr h="385546">
+                <a:tc>
+                  <a:txBody>
+                    <a:bodyPr/>
+                    <a:lstStyle/>
+                    <a:p>
+                      <a:pPr>
+                        <a:buNone/>
+                      </a:pPr>
+                      <a:r>
+                        <a:rPr lang="es-419" sz="900" b="1">
+                          <a:solidFill>
+                            <a:schemeClr val="bg1"/>
+                          </a:solidFill>
+                        </a:rPr>
+                        <a:t>Qué puede hacer</a:t>
+                      </a:r>
+                      <a:endParaRPr lang="es-419" sz="900">
+                        <a:solidFill>
+                          <a:schemeClr val="bg1"/>
+                        </a:solidFill>
+                      </a:endParaRPr>
+                    </a:p>
+                  </a:txBody>
+                  <a:tcPr marL="29657" marR="29657" marT="14829" marB="14829" anchor="ctr">
+                    <a:solidFill>
+                      <a:srgbClr val="0D1117"/>
+                    </a:solidFill>
+                  </a:tcPr>
+                </a:tc>
+                <a:tc>
+                  <a:txBody>
+                    <a:bodyPr/>
+                    <a:lstStyle/>
+                    <a:p>
+                      <a:pPr>
+                        <a:buNone/>
+                      </a:pPr>
+                      <a:r>
+                        <a:rPr lang="es-419" sz="900" dirty="0">
+                          <a:solidFill>
+                            <a:schemeClr val="bg1"/>
+                          </a:solidFill>
+                        </a:rPr>
+                        <a:t>Buscar archivos, proponer cambios, editar código, sugerir comandos, iterar sobre errores.</a:t>
+                      </a:r>
+                    </a:p>
+                  </a:txBody>
+                  <a:tcPr marL="29657" marR="29657" marT="14829" marB="14829" anchor="ctr">
+                    <a:solidFill>
+                      <a:srgbClr val="0D1117"/>
+                    </a:solidFill>
+                  </a:tcPr>
+                </a:tc>
+                <a:tc>
+                  <a:txBody>
+                    <a:bodyPr/>
+                    <a:lstStyle/>
+                    <a:p>
+                      <a:pPr>
+                        <a:buNone/>
+                      </a:pPr>
+                      <a:r>
+                        <a:rPr lang="es-MX" sz="900" dirty="0">
+                          <a:solidFill>
+                            <a:schemeClr val="bg1"/>
+                          </a:solidFill>
+                        </a:rPr>
+                        <a:t>Analizar el repo, crear una rama, modificar archivos, ejecutar pruebas y abrir una Pull </a:t>
+                      </a:r>
+                      <a:r>
+                        <a:rPr lang="es-MX" sz="900" dirty="0" err="1">
+                          <a:solidFill>
+                            <a:schemeClr val="bg1"/>
+                          </a:solidFill>
+                        </a:rPr>
+                        <a:t>Request</a:t>
+                      </a:r>
+                      <a:r>
+                        <a:rPr lang="es-MX" sz="900" dirty="0">
+                          <a:solidFill>
+                            <a:schemeClr val="bg1"/>
+                          </a:solidFill>
+                        </a:rPr>
+                        <a:t>.</a:t>
+                      </a:r>
+                    </a:p>
+                  </a:txBody>
+                  <a:tcPr marL="29657" marR="29657" marT="14829" marB="14829" anchor="ctr">
+                    <a:solidFill>
+                      <a:srgbClr val="0D1117"/>
+                    </a:solidFill>
+                  </a:tcPr>
+                </a:tc>
+                <a:extLst>
+                  <a:ext uri="{0D108BD9-81ED-4DB2-BD59-A6C34878D82A}">
+                    <a16:rowId xmlns:a16="http://schemas.microsoft.com/office/drawing/2014/main" val="2837580706"/>
+                  </a:ext>
+                </a:extLst>
+              </a:tr>
+              <a:tr h="296574">
+                <a:tc>
+                  <a:txBody>
+                    <a:bodyPr/>
+                    <a:lstStyle/>
+                    <a:p>
+                      <a:pPr>
+                        <a:buNone/>
+                      </a:pPr>
+                      <a:r>
+                        <a:rPr lang="es-419" sz="900" b="1">
+                          <a:solidFill>
+                            <a:schemeClr val="bg1"/>
+                          </a:solidFill>
+                        </a:rPr>
+                        <a:t>Resultado típico</a:t>
+                      </a:r>
+                      <a:endParaRPr lang="es-419" sz="900">
+                        <a:solidFill>
+                          <a:schemeClr val="bg1"/>
+                        </a:solidFill>
+                      </a:endParaRPr>
+                    </a:p>
+                  </a:txBody>
+                  <a:tcPr marL="29657" marR="29657" marT="14829" marB="14829" anchor="ctr">
+                    <a:solidFill>
+                      <a:srgbClr val="0D1117"/>
+                    </a:solidFill>
+                  </a:tcPr>
+                </a:tc>
+                <a:tc>
+                  <a:txBody>
+                    <a:bodyPr/>
+                    <a:lstStyle/>
+                    <a:p>
+                      <a:pPr>
+                        <a:buNone/>
+                      </a:pPr>
+                      <a:r>
+                        <a:rPr lang="es-419" sz="900" dirty="0">
+                          <a:solidFill>
+                            <a:schemeClr val="bg1"/>
+                          </a:solidFill>
+                        </a:rPr>
+                        <a:t>Cambios aplicados o sugeridos directamente en tu proyecto local.</a:t>
+                      </a:r>
+                    </a:p>
+                  </a:txBody>
+                  <a:tcPr marL="29657" marR="29657" marT="14829" marB="14829" anchor="ctr">
+                    <a:solidFill>
+                      <a:srgbClr val="0D1117"/>
+                    </a:solidFill>
+                  </a:tcPr>
+                </a:tc>
+                <a:tc>
+                  <a:txBody>
+                    <a:bodyPr/>
+                    <a:lstStyle/>
+                    <a:p>
+                      <a:pPr>
+                        <a:buNone/>
+                      </a:pPr>
+                      <a:r>
+                        <a:rPr lang="es-419" sz="900">
+                          <a:solidFill>
+                            <a:schemeClr val="bg1"/>
+                          </a:solidFill>
+                        </a:rPr>
+                        <a:t>Una Pull Request lista para revisar.</a:t>
+                      </a:r>
+                    </a:p>
+                  </a:txBody>
+                  <a:tcPr marL="29657" marR="29657" marT="14829" marB="14829" anchor="ctr">
+                    <a:solidFill>
+                      <a:srgbClr val="0D1117"/>
+                    </a:solidFill>
+                  </a:tcPr>
+                </a:tc>
+                <a:extLst>
+                  <a:ext uri="{0D108BD9-81ED-4DB2-BD59-A6C34878D82A}">
+                    <a16:rowId xmlns:a16="http://schemas.microsoft.com/office/drawing/2014/main" val="2683953097"/>
+                  </a:ext>
+                </a:extLst>
+              </a:tr>
+              <a:tr h="296574">
+                <a:tc>
+                  <a:txBody>
+                    <a:bodyPr/>
+                    <a:lstStyle/>
+                    <a:p>
+                      <a:pPr>
+                        <a:buNone/>
+                      </a:pPr>
+                      <a:r>
+                        <a:rPr lang="es-419" sz="900" b="1">
+                          <a:solidFill>
+                            <a:schemeClr val="bg1"/>
+                          </a:solidFill>
+                        </a:rPr>
+                        <a:t>Relación con Git</a:t>
+                      </a:r>
+                      <a:endParaRPr lang="es-419" sz="900">
+                        <a:solidFill>
+                          <a:schemeClr val="bg1"/>
+                        </a:solidFill>
+                      </a:endParaRPr>
+                    </a:p>
+                  </a:txBody>
+                  <a:tcPr marL="29657" marR="29657" marT="14829" marB="14829" anchor="ctr">
+                    <a:solidFill>
+                      <a:srgbClr val="0D1117"/>
+                    </a:solidFill>
+                  </a:tcPr>
+                </a:tc>
+                <a:tc>
+                  <a:txBody>
+                    <a:bodyPr/>
+                    <a:lstStyle/>
+                    <a:p>
+                      <a:pPr>
+                        <a:buNone/>
+                      </a:pPr>
+                      <a:r>
+                        <a:rPr lang="es-MX" sz="900">
+                          <a:solidFill>
+                            <a:schemeClr val="bg1"/>
+                          </a:solidFill>
+                        </a:rPr>
+                        <a:t>No necesariamente crea ramas ni PRs por sí solo. Trabaja en tu copia local.</a:t>
+                      </a:r>
+                    </a:p>
+                  </a:txBody>
+                  <a:tcPr marL="29657" marR="29657" marT="14829" marB="14829" anchor="ctr">
+                    <a:solidFill>
+                      <a:srgbClr val="0D1117"/>
+                    </a:solidFill>
+                  </a:tcPr>
+                </a:tc>
+                <a:tc>
+                  <a:txBody>
+                    <a:bodyPr/>
+                    <a:lstStyle/>
+                    <a:p>
+                      <a:pPr>
+                        <a:buNone/>
+                      </a:pPr>
+                      <a:r>
+                        <a:rPr lang="es-MX" sz="900" dirty="0">
+                          <a:solidFill>
+                            <a:schemeClr val="bg1"/>
+                          </a:solidFill>
+                        </a:rPr>
+                        <a:t>Sí puede crear rama y PR en GitHub.</a:t>
+                      </a:r>
+                    </a:p>
+                  </a:txBody>
+                  <a:tcPr marL="29657" marR="29657" marT="14829" marB="14829" anchor="ctr">
+                    <a:solidFill>
+                      <a:srgbClr val="0D1117"/>
+                    </a:solidFill>
+                  </a:tcPr>
+                </a:tc>
+                <a:extLst>
+                  <a:ext uri="{0D108BD9-81ED-4DB2-BD59-A6C34878D82A}">
+                    <a16:rowId xmlns:a16="http://schemas.microsoft.com/office/drawing/2014/main" val="2869447137"/>
+                  </a:ext>
+                </a:extLst>
+              </a:tr>
+              <a:tr h="385546">
+                <a:tc>
+                  <a:txBody>
+                    <a:bodyPr/>
+                    <a:lstStyle/>
+                    <a:p>
+                      <a:pPr>
+                        <a:buNone/>
+                      </a:pPr>
+                      <a:r>
+                        <a:rPr lang="es-419" sz="900" b="1">
+                          <a:solidFill>
+                            <a:schemeClr val="bg1"/>
+                          </a:solidFill>
+                        </a:rPr>
+                        <a:t>Uso ideal</a:t>
+                      </a:r>
+                      <a:endParaRPr lang="es-419" sz="900">
+                        <a:solidFill>
+                          <a:schemeClr val="bg1"/>
+                        </a:solidFill>
+                      </a:endParaRPr>
+                    </a:p>
+                  </a:txBody>
+                  <a:tcPr marL="29657" marR="29657" marT="14829" marB="14829" anchor="ctr">
+                    <a:solidFill>
+                      <a:srgbClr val="0D1117"/>
+                    </a:solidFill>
+                  </a:tcPr>
+                </a:tc>
+                <a:tc>
+                  <a:txBody>
+                    <a:bodyPr/>
+                    <a:lstStyle/>
+                    <a:p>
+                      <a:pPr>
+                        <a:buNone/>
+                      </a:pPr>
+                      <a:r>
+                        <a:rPr lang="es-MX" sz="900">
+                          <a:solidFill>
+                            <a:schemeClr val="bg1"/>
+                          </a:solidFill>
+                        </a:rPr>
+                        <a:t>Cuando estás programando activamente y querés ayuda paso a paso.</a:t>
+                      </a:r>
+                    </a:p>
+                  </a:txBody>
+                  <a:tcPr marL="29657" marR="29657" marT="14829" marB="14829" anchor="ctr">
+                    <a:solidFill>
+                      <a:srgbClr val="0D1117"/>
+                    </a:solidFill>
+                  </a:tcPr>
+                </a:tc>
+                <a:tc>
+                  <a:txBody>
+                    <a:bodyPr/>
+                    <a:lstStyle/>
+                    <a:p>
+                      <a:pPr>
+                        <a:buNone/>
+                      </a:pPr>
+                      <a:r>
+                        <a:rPr lang="es-MX" sz="900" dirty="0">
+                          <a:solidFill>
+                            <a:schemeClr val="bg1"/>
+                          </a:solidFill>
+                        </a:rPr>
+                        <a:t>Cuando querés delegar una tarea más cerrada para que </a:t>
+                      </a:r>
+                      <a:r>
+                        <a:rPr lang="es-MX" sz="900" dirty="0" err="1">
+                          <a:solidFill>
+                            <a:schemeClr val="bg1"/>
+                          </a:solidFill>
+                        </a:rPr>
+                        <a:t>Copilot</a:t>
+                      </a:r>
+                      <a:r>
+                        <a:rPr lang="es-MX" sz="900" dirty="0">
+                          <a:solidFill>
+                            <a:schemeClr val="bg1"/>
+                          </a:solidFill>
+                        </a:rPr>
+                        <a:t> la trabaje aparte.</a:t>
+                      </a:r>
+                    </a:p>
+                  </a:txBody>
+                  <a:tcPr marL="29657" marR="29657" marT="14829" marB="14829" anchor="ctr">
+                    <a:solidFill>
+                      <a:srgbClr val="0D1117"/>
+                    </a:solidFill>
+                  </a:tcPr>
+                </a:tc>
+                <a:extLst>
+                  <a:ext uri="{0D108BD9-81ED-4DB2-BD59-A6C34878D82A}">
+                    <a16:rowId xmlns:a16="http://schemas.microsoft.com/office/drawing/2014/main" val="2692420160"/>
+                  </a:ext>
+                </a:extLst>
+              </a:tr>
+              <a:tr h="207602">
+                <a:tc>
+                  <a:txBody>
+                    <a:bodyPr/>
+                    <a:lstStyle/>
+                    <a:p>
+                      <a:pPr>
+                        <a:buNone/>
+                      </a:pPr>
+                      <a:r>
+                        <a:rPr lang="es-419" sz="900" b="1">
+                          <a:solidFill>
+                            <a:schemeClr val="bg1"/>
+                          </a:solidFill>
+                        </a:rPr>
+                        <a:t>Supervisión humana</a:t>
+                      </a:r>
+                      <a:endParaRPr lang="es-419" sz="900">
+                        <a:solidFill>
+                          <a:schemeClr val="bg1"/>
+                        </a:solidFill>
+                      </a:endParaRPr>
+                    </a:p>
+                  </a:txBody>
+                  <a:tcPr marL="29657" marR="29657" marT="14829" marB="14829" anchor="ctr">
+                    <a:solidFill>
+                      <a:srgbClr val="0D1117"/>
+                    </a:solidFill>
+                  </a:tcPr>
+                </a:tc>
+                <a:tc>
+                  <a:txBody>
+                    <a:bodyPr/>
+                    <a:lstStyle/>
+                    <a:p>
+                      <a:pPr>
+                        <a:buNone/>
+                      </a:pPr>
+                      <a:r>
+                        <a:rPr lang="es-MX" sz="900">
+                          <a:solidFill>
+                            <a:schemeClr val="bg1"/>
+                          </a:solidFill>
+                        </a:rPr>
+                        <a:t>Muy inmediata: ves los cambios en el editor.</a:t>
+                      </a:r>
+                    </a:p>
+                  </a:txBody>
+                  <a:tcPr marL="29657" marR="29657" marT="14829" marB="14829" anchor="ctr">
+                    <a:solidFill>
+                      <a:srgbClr val="0D1117"/>
+                    </a:solidFill>
+                  </a:tcPr>
+                </a:tc>
+                <a:tc>
+                  <a:txBody>
+                    <a:bodyPr/>
+                    <a:lstStyle/>
+                    <a:p>
+                      <a:pPr>
+                        <a:buNone/>
+                      </a:pPr>
+                      <a:r>
+                        <a:rPr lang="es-MX" sz="900" dirty="0">
+                          <a:solidFill>
+                            <a:schemeClr val="bg1"/>
+                          </a:solidFill>
+                        </a:rPr>
+                        <a:t>Posterior: </a:t>
+                      </a:r>
+                      <a:r>
+                        <a:rPr lang="es-MX" sz="900" dirty="0" err="1">
+                          <a:solidFill>
+                            <a:schemeClr val="bg1"/>
+                          </a:solidFill>
+                        </a:rPr>
+                        <a:t>revisás</a:t>
+                      </a:r>
+                      <a:r>
+                        <a:rPr lang="es-MX" sz="900" dirty="0">
+                          <a:solidFill>
+                            <a:schemeClr val="bg1"/>
+                          </a:solidFill>
+                        </a:rPr>
+                        <a:t> la PR que genera.</a:t>
+                      </a:r>
+                    </a:p>
+                  </a:txBody>
+                  <a:tcPr marL="29657" marR="29657" marT="14829" marB="14829" anchor="ctr">
+                    <a:solidFill>
+                      <a:srgbClr val="0D1117"/>
+                    </a:solidFill>
+                  </a:tcPr>
+                </a:tc>
+                <a:extLst>
+                  <a:ext uri="{0D108BD9-81ED-4DB2-BD59-A6C34878D82A}">
+                    <a16:rowId xmlns:a16="http://schemas.microsoft.com/office/drawing/2014/main" val="2166873049"/>
+                  </a:ext>
+                </a:extLst>
+              </a:tr>
+              <a:tr h="296574">
+                <a:tc>
+                  <a:txBody>
+                    <a:bodyPr/>
+                    <a:lstStyle/>
+                    <a:p>
+                      <a:pPr>
+                        <a:buNone/>
+                      </a:pPr>
+                      <a:r>
+                        <a:rPr lang="es-419" sz="900" b="1">
+                          <a:solidFill>
+                            <a:schemeClr val="bg1"/>
+                          </a:solidFill>
+                        </a:rPr>
+                        <a:t>Ejemplo de pedido</a:t>
+                      </a:r>
+                      <a:endParaRPr lang="es-419" sz="900">
+                        <a:solidFill>
+                          <a:schemeClr val="bg1"/>
+                        </a:solidFill>
+                      </a:endParaRPr>
+                    </a:p>
+                  </a:txBody>
+                  <a:tcPr marL="29657" marR="29657" marT="14829" marB="14829" anchor="ctr">
+                    <a:solidFill>
+                      <a:srgbClr val="0D1117"/>
+                    </a:solidFill>
+                  </a:tcPr>
+                </a:tc>
+                <a:tc>
+                  <a:txBody>
+                    <a:bodyPr/>
+                    <a:lstStyle/>
+                    <a:p>
+                      <a:pPr>
+                        <a:buNone/>
+                      </a:pPr>
+                      <a:r>
+                        <a:rPr lang="es-MX" sz="900">
+                          <a:solidFill>
+                            <a:schemeClr val="bg1"/>
+                          </a:solidFill>
+                        </a:rPr>
+                        <a:t>“Refactorizá esta función y agregá validaciones.”</a:t>
+                      </a:r>
+                    </a:p>
+                  </a:txBody>
+                  <a:tcPr marL="29657" marR="29657" marT="14829" marB="14829" anchor="ctr">
+                    <a:solidFill>
+                      <a:srgbClr val="0D1117"/>
+                    </a:solidFill>
+                  </a:tcPr>
+                </a:tc>
+                <a:tc>
+                  <a:txBody>
+                    <a:bodyPr/>
+                    <a:lstStyle/>
+                    <a:p>
+                      <a:pPr>
+                        <a:buNone/>
+                      </a:pPr>
+                      <a:r>
+                        <a:rPr lang="es-MX" sz="900" dirty="0">
+                          <a:solidFill>
+                            <a:schemeClr val="bg1"/>
+                          </a:solidFill>
+                        </a:rPr>
+                        <a:t>“</a:t>
+                      </a:r>
+                      <a:r>
+                        <a:rPr lang="es-MX" sz="900" dirty="0" err="1">
+                          <a:solidFill>
+                            <a:schemeClr val="bg1"/>
+                          </a:solidFill>
+                        </a:rPr>
+                        <a:t>Implementá</a:t>
+                      </a:r>
+                      <a:r>
+                        <a:rPr lang="es-MX" sz="900" dirty="0">
+                          <a:solidFill>
+                            <a:schemeClr val="bg1"/>
+                          </a:solidFill>
+                        </a:rPr>
+                        <a:t> este </a:t>
+                      </a:r>
+                      <a:r>
+                        <a:rPr lang="es-MX" sz="900" dirty="0" err="1">
+                          <a:solidFill>
+                            <a:schemeClr val="bg1"/>
+                          </a:solidFill>
+                        </a:rPr>
+                        <a:t>issue</a:t>
+                      </a:r>
+                      <a:r>
+                        <a:rPr lang="es-MX" sz="900" dirty="0">
+                          <a:solidFill>
+                            <a:schemeClr val="bg1"/>
+                          </a:solidFill>
+                        </a:rPr>
+                        <a:t> y abrí una PR con la solución.”</a:t>
+                      </a:r>
+                    </a:p>
+                  </a:txBody>
+                  <a:tcPr marL="29657" marR="29657" marT="14829" marB="14829" anchor="ctr">
+                    <a:solidFill>
+                      <a:srgbClr val="0D1117"/>
+                    </a:solidFill>
+                  </a:tcPr>
+                </a:tc>
+                <a:extLst>
+                  <a:ext uri="{0D108BD9-81ED-4DB2-BD59-A6C34878D82A}">
+                    <a16:rowId xmlns:a16="http://schemas.microsoft.com/office/drawing/2014/main" val="418487742"/>
+                  </a:ext>
+                </a:extLst>
+              </a:tr>
+            </a:tbl>
+          </a:graphicData>
+        </a:graphic>
+      </p:graphicFrame>
+    </p:spTree>
+    <p:extLst>
+      <p:ext uri="{BB962C8B-B14F-4D97-AF65-F5344CB8AC3E}">
+        <p14:creationId xmlns:p14="http://schemas.microsoft.com/office/powerpoint/2010/main" val="2805181015"/>
+      </p:ext>
+    </p:extLst>
+  </p:cSld>
+  <p:clrMapOvr>
+    <a:masterClrMapping/>
+  </p:clrMapOvr>
+</p:sld>
+</file>
+
+<file path=ppt/slides/slide11.xml><?xml version="1.0" encoding="utf-8"?>
+<p:sld xmlns:a="http://schemas.openxmlformats.org/drawingml/2006/main" xmlns:r="http://schemas.openxmlformats.org/officeDocument/2006/relationships" xmlns:p="http://schemas.openxmlformats.org/presentationml/2006/main">
   <p:cSld name="Slide 6">
     <p:bg>
       <p:bgPr>
@@ -3700,7 +5075,7 @@
 </p:sld>
 </file>
 
-<file path=ppt/slides/slide11.xml><?xml version="1.0" encoding="utf-8"?>
+<file path=ppt/slides/slide12.xml><?xml version="1.0" encoding="utf-8"?>
 <p:sld xmlns:a="http://schemas.openxmlformats.org/drawingml/2006/main" xmlns:r="http://schemas.openxmlformats.org/officeDocument/2006/relationships" xmlns:p="http://schemas.openxmlformats.org/presentationml/2006/main">
   <p:cSld name="Slide 7">
     <p:bg>
@@ -5211,7 +6586,7 @@
 </p:sld>
 </file>
 
-<file path=ppt/slides/slide12.xml><?xml version="1.0" encoding="utf-8"?>
+<file path=ppt/slides/slide13.xml><?xml version="1.0" encoding="utf-8"?>
 <p:sld xmlns:a="http://schemas.openxmlformats.org/drawingml/2006/main" xmlns:r="http://schemas.openxmlformats.org/officeDocument/2006/relationships" xmlns:p="http://schemas.openxmlformats.org/presentationml/2006/main">
   <p:cSld>
     <p:bg>
@@ -6088,7 +7463,7 @@
 </p:sld>
 </file>
 
-<file path=ppt/slides/slide13.xml><?xml version="1.0" encoding="utf-8"?>
+<file path=ppt/slides/slide14.xml><?xml version="1.0" encoding="utf-8"?>
 <p:sld xmlns:a="http://schemas.openxmlformats.org/drawingml/2006/main" xmlns:r="http://schemas.openxmlformats.org/officeDocument/2006/relationships" xmlns:p="http://schemas.openxmlformats.org/presentationml/2006/main">
   <p:cSld>
     <p:bg>
@@ -6407,7 +7782,7 @@
 </p:sld>
 </file>
 
-<file path=ppt/slides/slide14.xml><?xml version="1.0" encoding="utf-8"?>
+<file path=ppt/slides/slide15.xml><?xml version="1.0" encoding="utf-8"?>
 <p:sld xmlns:a="http://schemas.openxmlformats.org/drawingml/2006/main" xmlns:r="http://schemas.openxmlformats.org/officeDocument/2006/relationships" xmlns:p="http://schemas.openxmlformats.org/presentationml/2006/main">
   <p:cSld>
     <p:bg>
@@ -7570,7 +8945,7 @@
 </p:sld>
 </file>
 
-<file path=ppt/slides/slide15.xml><?xml version="1.0" encoding="utf-8"?>
+<file path=ppt/slides/slide16.xml><?xml version="1.0" encoding="utf-8"?>
 <p:sld xmlns:a="http://schemas.openxmlformats.org/drawingml/2006/main" xmlns:r="http://schemas.openxmlformats.org/officeDocument/2006/relationships" xmlns:p="http://schemas.openxmlformats.org/presentationml/2006/main">
   <p:cSld>
     <p:bg>
@@ -8034,997 +9409,6 @@
         <p14:creationId xmlns:p14="http://schemas.microsoft.com/office/powerpoint/2010/main" val="3608751176"/>
       </p:ext>
     </p:extLst>
-  </p:cSld>
-  <p:clrMapOvr>
-    <a:masterClrMapping/>
-  </p:clrMapOvr>
-</p:sld>
-</file>
-
-<file path=ppt/slides/slide16.xml><?xml version="1.0" encoding="utf-8"?>
-<p:sld xmlns:a="http://schemas.openxmlformats.org/drawingml/2006/main" xmlns:r="http://schemas.openxmlformats.org/officeDocument/2006/relationships" xmlns:p="http://schemas.openxmlformats.org/presentationml/2006/main">
-  <p:cSld name="Slide 8">
-    <p:bg>
-      <p:bgPr>
-        <a:solidFill>
-          <a:srgbClr val="0D1117"/>
-        </a:solidFill>
-        <a:effectLst/>
-      </p:bgPr>
-    </p:bg>
-    <p:spTree>
-      <p:nvGrpSpPr>
-        <p:cNvPr id="1" name=""/>
-        <p:cNvGrpSpPr/>
-        <p:nvPr/>
-      </p:nvGrpSpPr>
-      <p:grpSpPr>
-        <a:xfrm>
-          <a:off x="0" y="0"/>
-          <a:ext cx="0" cy="0"/>
-          <a:chOff x="0" y="0"/>
-          <a:chExt cx="0" cy="0"/>
-        </a:xfrm>
-      </p:grpSpPr>
-      <p:sp>
-        <p:nvSpPr>
-          <p:cNvPr id="2" name="Shape 0"/>
-          <p:cNvSpPr/>
-          <p:nvPr/>
-        </p:nvSpPr>
-        <p:spPr>
-          <a:xfrm>
-            <a:off x="274320" y="274320"/>
-            <a:ext cx="73152" cy="73152"/>
-          </a:xfrm>
-          <a:prstGeom prst="ellipse">
-            <a:avLst/>
-          </a:prstGeom>
-          <a:solidFill>
-            <a:srgbClr val="58A6FF">
-              <a:alpha val="30000"/>
-            </a:srgbClr>
-          </a:solidFill>
-          <a:ln/>
-        </p:spPr>
-        <p:txBody>
-          <a:bodyPr/>
-          <a:lstStyle/>
-          <a:p>
-            <a:endParaRPr lang="es-419" noProof="0" dirty="0"/>
-          </a:p>
-        </p:txBody>
-      </p:sp>
-      <p:sp>
-        <p:nvSpPr>
-          <p:cNvPr id="3" name="Shape 1"/>
-          <p:cNvSpPr/>
-          <p:nvPr/>
-        </p:nvSpPr>
-        <p:spPr>
-          <a:xfrm>
-            <a:off x="274320" y="594360"/>
-            <a:ext cx="73152" cy="73152"/>
-          </a:xfrm>
-          <a:prstGeom prst="ellipse">
-            <a:avLst/>
-          </a:prstGeom>
-          <a:solidFill>
-            <a:srgbClr val="58A6FF">
-              <a:alpha val="30000"/>
-            </a:srgbClr>
-          </a:solidFill>
-          <a:ln/>
-        </p:spPr>
-        <p:txBody>
-          <a:bodyPr/>
-          <a:lstStyle/>
-          <a:p>
-            <a:endParaRPr lang="es-419" noProof="0" dirty="0"/>
-          </a:p>
-        </p:txBody>
-      </p:sp>
-      <p:sp>
-        <p:nvSpPr>
-          <p:cNvPr id="4" name="Shape 2"/>
-          <p:cNvSpPr/>
-          <p:nvPr/>
-        </p:nvSpPr>
-        <p:spPr>
-          <a:xfrm>
-            <a:off x="274320" y="914400"/>
-            <a:ext cx="73152" cy="73152"/>
-          </a:xfrm>
-          <a:prstGeom prst="ellipse">
-            <a:avLst/>
-          </a:prstGeom>
-          <a:solidFill>
-            <a:srgbClr val="58A6FF">
-              <a:alpha val="30000"/>
-            </a:srgbClr>
-          </a:solidFill>
-          <a:ln/>
-        </p:spPr>
-        <p:txBody>
-          <a:bodyPr/>
-          <a:lstStyle/>
-          <a:p>
-            <a:endParaRPr lang="es-419" noProof="0" dirty="0"/>
-          </a:p>
-        </p:txBody>
-      </p:sp>
-      <p:sp>
-        <p:nvSpPr>
-          <p:cNvPr id="5" name="Shape 3"/>
-          <p:cNvSpPr/>
-          <p:nvPr/>
-        </p:nvSpPr>
-        <p:spPr>
-          <a:xfrm>
-            <a:off x="274320" y="1234440"/>
-            <a:ext cx="73152" cy="73152"/>
-          </a:xfrm>
-          <a:prstGeom prst="ellipse">
-            <a:avLst/>
-          </a:prstGeom>
-          <a:solidFill>
-            <a:srgbClr val="58A6FF">
-              <a:alpha val="30000"/>
-            </a:srgbClr>
-          </a:solidFill>
-          <a:ln/>
-        </p:spPr>
-        <p:txBody>
-          <a:bodyPr/>
-          <a:lstStyle/>
-          <a:p>
-            <a:endParaRPr lang="es-419" noProof="0" dirty="0"/>
-          </a:p>
-        </p:txBody>
-      </p:sp>
-      <p:sp>
-        <p:nvSpPr>
-          <p:cNvPr id="6" name="Shape 4"/>
-          <p:cNvSpPr/>
-          <p:nvPr/>
-        </p:nvSpPr>
-        <p:spPr>
-          <a:xfrm>
-            <a:off x="594360" y="274320"/>
-            <a:ext cx="73152" cy="73152"/>
-          </a:xfrm>
-          <a:prstGeom prst="ellipse">
-            <a:avLst/>
-          </a:prstGeom>
-          <a:solidFill>
-            <a:srgbClr val="58A6FF">
-              <a:alpha val="30000"/>
-            </a:srgbClr>
-          </a:solidFill>
-          <a:ln/>
-        </p:spPr>
-        <p:txBody>
-          <a:bodyPr/>
-          <a:lstStyle/>
-          <a:p>
-            <a:endParaRPr lang="es-419" noProof="0" dirty="0"/>
-          </a:p>
-        </p:txBody>
-      </p:sp>
-      <p:sp>
-        <p:nvSpPr>
-          <p:cNvPr id="7" name="Shape 5"/>
-          <p:cNvSpPr/>
-          <p:nvPr/>
-        </p:nvSpPr>
-        <p:spPr>
-          <a:xfrm>
-            <a:off x="594360" y="594360"/>
-            <a:ext cx="73152" cy="73152"/>
-          </a:xfrm>
-          <a:prstGeom prst="ellipse">
-            <a:avLst/>
-          </a:prstGeom>
-          <a:solidFill>
-            <a:srgbClr val="58A6FF">
-              <a:alpha val="30000"/>
-            </a:srgbClr>
-          </a:solidFill>
-          <a:ln/>
-        </p:spPr>
-        <p:txBody>
-          <a:bodyPr/>
-          <a:lstStyle/>
-          <a:p>
-            <a:endParaRPr lang="es-419" noProof="0" dirty="0"/>
-          </a:p>
-        </p:txBody>
-      </p:sp>
-      <p:sp>
-        <p:nvSpPr>
-          <p:cNvPr id="8" name="Shape 6"/>
-          <p:cNvSpPr/>
-          <p:nvPr/>
-        </p:nvSpPr>
-        <p:spPr>
-          <a:xfrm>
-            <a:off x="594360" y="914400"/>
-            <a:ext cx="73152" cy="73152"/>
-          </a:xfrm>
-          <a:prstGeom prst="ellipse">
-            <a:avLst/>
-          </a:prstGeom>
-          <a:solidFill>
-            <a:srgbClr val="58A6FF">
-              <a:alpha val="30000"/>
-            </a:srgbClr>
-          </a:solidFill>
-          <a:ln/>
-        </p:spPr>
-        <p:txBody>
-          <a:bodyPr/>
-          <a:lstStyle/>
-          <a:p>
-            <a:endParaRPr lang="es-419" noProof="0" dirty="0"/>
-          </a:p>
-        </p:txBody>
-      </p:sp>
-      <p:sp>
-        <p:nvSpPr>
-          <p:cNvPr id="9" name="Shape 7"/>
-          <p:cNvSpPr/>
-          <p:nvPr/>
-        </p:nvSpPr>
-        <p:spPr>
-          <a:xfrm>
-            <a:off x="594360" y="1234440"/>
-            <a:ext cx="73152" cy="73152"/>
-          </a:xfrm>
-          <a:prstGeom prst="ellipse">
-            <a:avLst/>
-          </a:prstGeom>
-          <a:solidFill>
-            <a:srgbClr val="58A6FF">
-              <a:alpha val="30000"/>
-            </a:srgbClr>
-          </a:solidFill>
-          <a:ln/>
-        </p:spPr>
-        <p:txBody>
-          <a:bodyPr/>
-          <a:lstStyle/>
-          <a:p>
-            <a:endParaRPr lang="es-419" noProof="0" dirty="0"/>
-          </a:p>
-        </p:txBody>
-      </p:sp>
-      <p:sp>
-        <p:nvSpPr>
-          <p:cNvPr id="10" name="Shape 8"/>
-          <p:cNvSpPr/>
-          <p:nvPr/>
-        </p:nvSpPr>
-        <p:spPr>
-          <a:xfrm>
-            <a:off x="914400" y="274320"/>
-            <a:ext cx="73152" cy="73152"/>
-          </a:xfrm>
-          <a:prstGeom prst="ellipse">
-            <a:avLst/>
-          </a:prstGeom>
-          <a:solidFill>
-            <a:srgbClr val="58A6FF">
-              <a:alpha val="30000"/>
-            </a:srgbClr>
-          </a:solidFill>
-          <a:ln/>
-        </p:spPr>
-        <p:txBody>
-          <a:bodyPr/>
-          <a:lstStyle/>
-          <a:p>
-            <a:endParaRPr lang="es-419" noProof="0" dirty="0"/>
-          </a:p>
-        </p:txBody>
-      </p:sp>
-      <p:sp>
-        <p:nvSpPr>
-          <p:cNvPr id="11" name="Shape 9"/>
-          <p:cNvSpPr/>
-          <p:nvPr/>
-        </p:nvSpPr>
-        <p:spPr>
-          <a:xfrm>
-            <a:off x="914400" y="594360"/>
-            <a:ext cx="73152" cy="73152"/>
-          </a:xfrm>
-          <a:prstGeom prst="ellipse">
-            <a:avLst/>
-          </a:prstGeom>
-          <a:solidFill>
-            <a:srgbClr val="58A6FF">
-              <a:alpha val="30000"/>
-            </a:srgbClr>
-          </a:solidFill>
-          <a:ln/>
-        </p:spPr>
-        <p:txBody>
-          <a:bodyPr/>
-          <a:lstStyle/>
-          <a:p>
-            <a:endParaRPr lang="es-419" noProof="0" dirty="0"/>
-          </a:p>
-        </p:txBody>
-      </p:sp>
-      <p:sp>
-        <p:nvSpPr>
-          <p:cNvPr id="12" name="Shape 10"/>
-          <p:cNvSpPr/>
-          <p:nvPr/>
-        </p:nvSpPr>
-        <p:spPr>
-          <a:xfrm>
-            <a:off x="914400" y="914400"/>
-            <a:ext cx="73152" cy="73152"/>
-          </a:xfrm>
-          <a:prstGeom prst="ellipse">
-            <a:avLst/>
-          </a:prstGeom>
-          <a:solidFill>
-            <a:srgbClr val="58A6FF">
-              <a:alpha val="30000"/>
-            </a:srgbClr>
-          </a:solidFill>
-          <a:ln/>
-        </p:spPr>
-        <p:txBody>
-          <a:bodyPr/>
-          <a:lstStyle/>
-          <a:p>
-            <a:endParaRPr lang="es-419" noProof="0" dirty="0"/>
-          </a:p>
-        </p:txBody>
-      </p:sp>
-      <p:sp>
-        <p:nvSpPr>
-          <p:cNvPr id="13" name="Shape 11"/>
-          <p:cNvSpPr/>
-          <p:nvPr/>
-        </p:nvSpPr>
-        <p:spPr>
-          <a:xfrm>
-            <a:off x="914400" y="1234440"/>
-            <a:ext cx="73152" cy="73152"/>
-          </a:xfrm>
-          <a:prstGeom prst="ellipse">
-            <a:avLst/>
-          </a:prstGeom>
-          <a:solidFill>
-            <a:srgbClr val="58A6FF">
-              <a:alpha val="30000"/>
-            </a:srgbClr>
-          </a:solidFill>
-          <a:ln/>
-        </p:spPr>
-        <p:txBody>
-          <a:bodyPr/>
-          <a:lstStyle/>
-          <a:p>
-            <a:endParaRPr lang="es-419" noProof="0" dirty="0"/>
-          </a:p>
-        </p:txBody>
-      </p:sp>
-      <p:sp>
-        <p:nvSpPr>
-          <p:cNvPr id="14" name="Shape 12"/>
-          <p:cNvSpPr/>
-          <p:nvPr/>
-        </p:nvSpPr>
-        <p:spPr>
-          <a:xfrm>
-            <a:off x="1234440" y="274320"/>
-            <a:ext cx="73152" cy="73152"/>
-          </a:xfrm>
-          <a:prstGeom prst="ellipse">
-            <a:avLst/>
-          </a:prstGeom>
-          <a:solidFill>
-            <a:srgbClr val="58A6FF">
-              <a:alpha val="30000"/>
-            </a:srgbClr>
-          </a:solidFill>
-          <a:ln/>
-        </p:spPr>
-        <p:txBody>
-          <a:bodyPr/>
-          <a:lstStyle/>
-          <a:p>
-            <a:endParaRPr lang="es-419" noProof="0" dirty="0"/>
-          </a:p>
-        </p:txBody>
-      </p:sp>
-      <p:sp>
-        <p:nvSpPr>
-          <p:cNvPr id="15" name="Shape 13"/>
-          <p:cNvSpPr/>
-          <p:nvPr/>
-        </p:nvSpPr>
-        <p:spPr>
-          <a:xfrm>
-            <a:off x="1234440" y="594360"/>
-            <a:ext cx="73152" cy="73152"/>
-          </a:xfrm>
-          <a:prstGeom prst="ellipse">
-            <a:avLst/>
-          </a:prstGeom>
-          <a:solidFill>
-            <a:srgbClr val="58A6FF">
-              <a:alpha val="30000"/>
-            </a:srgbClr>
-          </a:solidFill>
-          <a:ln/>
-        </p:spPr>
-        <p:txBody>
-          <a:bodyPr/>
-          <a:lstStyle/>
-          <a:p>
-            <a:endParaRPr lang="es-419" noProof="0" dirty="0"/>
-          </a:p>
-        </p:txBody>
-      </p:sp>
-      <p:sp>
-        <p:nvSpPr>
-          <p:cNvPr id="16" name="Shape 14"/>
-          <p:cNvSpPr/>
-          <p:nvPr/>
-        </p:nvSpPr>
-        <p:spPr>
-          <a:xfrm>
-            <a:off x="1234440" y="914400"/>
-            <a:ext cx="73152" cy="73152"/>
-          </a:xfrm>
-          <a:prstGeom prst="ellipse">
-            <a:avLst/>
-          </a:prstGeom>
-          <a:solidFill>
-            <a:srgbClr val="58A6FF">
-              <a:alpha val="30000"/>
-            </a:srgbClr>
-          </a:solidFill>
-          <a:ln/>
-        </p:spPr>
-        <p:txBody>
-          <a:bodyPr/>
-          <a:lstStyle/>
-          <a:p>
-            <a:endParaRPr lang="es-419" noProof="0" dirty="0"/>
-          </a:p>
-        </p:txBody>
-      </p:sp>
-      <p:sp>
-        <p:nvSpPr>
-          <p:cNvPr id="17" name="Shape 15"/>
-          <p:cNvSpPr/>
-          <p:nvPr/>
-        </p:nvSpPr>
-        <p:spPr>
-          <a:xfrm>
-            <a:off x="1234440" y="1234440"/>
-            <a:ext cx="73152" cy="73152"/>
-          </a:xfrm>
-          <a:prstGeom prst="ellipse">
-            <a:avLst/>
-          </a:prstGeom>
-          <a:solidFill>
-            <a:srgbClr val="58A6FF">
-              <a:alpha val="30000"/>
-            </a:srgbClr>
-          </a:solidFill>
-          <a:ln/>
-        </p:spPr>
-        <p:txBody>
-          <a:bodyPr/>
-          <a:lstStyle/>
-          <a:p>
-            <a:endParaRPr lang="es-419" noProof="0" dirty="0"/>
-          </a:p>
-        </p:txBody>
-      </p:sp>
-      <p:sp>
-        <p:nvSpPr>
-          <p:cNvPr id="18" name="Shape 16"/>
-          <p:cNvSpPr/>
-          <p:nvPr/>
-        </p:nvSpPr>
-        <p:spPr>
-          <a:xfrm>
-            <a:off x="1554480" y="274320"/>
-            <a:ext cx="73152" cy="73152"/>
-          </a:xfrm>
-          <a:prstGeom prst="ellipse">
-            <a:avLst/>
-          </a:prstGeom>
-          <a:solidFill>
-            <a:srgbClr val="58A6FF">
-              <a:alpha val="30000"/>
-            </a:srgbClr>
-          </a:solidFill>
-          <a:ln/>
-        </p:spPr>
-        <p:txBody>
-          <a:bodyPr/>
-          <a:lstStyle/>
-          <a:p>
-            <a:endParaRPr lang="es-419" noProof="0" dirty="0"/>
-          </a:p>
-        </p:txBody>
-      </p:sp>
-      <p:sp>
-        <p:nvSpPr>
-          <p:cNvPr id="19" name="Shape 17"/>
-          <p:cNvSpPr/>
-          <p:nvPr/>
-        </p:nvSpPr>
-        <p:spPr>
-          <a:xfrm>
-            <a:off x="1554480" y="594360"/>
-            <a:ext cx="73152" cy="73152"/>
-          </a:xfrm>
-          <a:prstGeom prst="ellipse">
-            <a:avLst/>
-          </a:prstGeom>
-          <a:solidFill>
-            <a:srgbClr val="58A6FF">
-              <a:alpha val="30000"/>
-            </a:srgbClr>
-          </a:solidFill>
-          <a:ln/>
-        </p:spPr>
-        <p:txBody>
-          <a:bodyPr/>
-          <a:lstStyle/>
-          <a:p>
-            <a:endParaRPr lang="es-419" noProof="0" dirty="0"/>
-          </a:p>
-        </p:txBody>
-      </p:sp>
-      <p:sp>
-        <p:nvSpPr>
-          <p:cNvPr id="20" name="Shape 18"/>
-          <p:cNvSpPr/>
-          <p:nvPr/>
-        </p:nvSpPr>
-        <p:spPr>
-          <a:xfrm>
-            <a:off x="1554480" y="914400"/>
-            <a:ext cx="73152" cy="73152"/>
-          </a:xfrm>
-          <a:prstGeom prst="ellipse">
-            <a:avLst/>
-          </a:prstGeom>
-          <a:solidFill>
-            <a:srgbClr val="58A6FF">
-              <a:alpha val="30000"/>
-            </a:srgbClr>
-          </a:solidFill>
-          <a:ln/>
-        </p:spPr>
-        <p:txBody>
-          <a:bodyPr/>
-          <a:lstStyle/>
-          <a:p>
-            <a:endParaRPr lang="es-419" noProof="0" dirty="0"/>
-          </a:p>
-        </p:txBody>
-      </p:sp>
-      <p:sp>
-        <p:nvSpPr>
-          <p:cNvPr id="21" name="Shape 19"/>
-          <p:cNvSpPr/>
-          <p:nvPr/>
-        </p:nvSpPr>
-        <p:spPr>
-          <a:xfrm>
-            <a:off x="1554480" y="1234440"/>
-            <a:ext cx="73152" cy="73152"/>
-          </a:xfrm>
-          <a:prstGeom prst="ellipse">
-            <a:avLst/>
-          </a:prstGeom>
-          <a:solidFill>
-            <a:srgbClr val="58A6FF">
-              <a:alpha val="30000"/>
-            </a:srgbClr>
-          </a:solidFill>
-          <a:ln/>
-        </p:spPr>
-        <p:txBody>
-          <a:bodyPr/>
-          <a:lstStyle/>
-          <a:p>
-            <a:endParaRPr lang="es-419" noProof="0" dirty="0"/>
-          </a:p>
-        </p:txBody>
-      </p:sp>
-      <p:sp>
-        <p:nvSpPr>
-          <p:cNvPr id="22" name="Shape 20"/>
-          <p:cNvSpPr/>
-          <p:nvPr/>
-        </p:nvSpPr>
-        <p:spPr>
-          <a:xfrm>
-            <a:off x="1874520" y="274320"/>
-            <a:ext cx="73152" cy="73152"/>
-          </a:xfrm>
-          <a:prstGeom prst="ellipse">
-            <a:avLst/>
-          </a:prstGeom>
-          <a:solidFill>
-            <a:srgbClr val="58A6FF">
-              <a:alpha val="30000"/>
-            </a:srgbClr>
-          </a:solidFill>
-          <a:ln/>
-        </p:spPr>
-        <p:txBody>
-          <a:bodyPr/>
-          <a:lstStyle/>
-          <a:p>
-            <a:endParaRPr lang="es-419" noProof="0" dirty="0"/>
-          </a:p>
-        </p:txBody>
-      </p:sp>
-      <p:sp>
-        <p:nvSpPr>
-          <p:cNvPr id="23" name="Shape 21"/>
-          <p:cNvSpPr/>
-          <p:nvPr/>
-        </p:nvSpPr>
-        <p:spPr>
-          <a:xfrm>
-            <a:off x="1874520" y="594360"/>
-            <a:ext cx="73152" cy="73152"/>
-          </a:xfrm>
-          <a:prstGeom prst="ellipse">
-            <a:avLst/>
-          </a:prstGeom>
-          <a:solidFill>
-            <a:srgbClr val="58A6FF">
-              <a:alpha val="30000"/>
-            </a:srgbClr>
-          </a:solidFill>
-          <a:ln/>
-        </p:spPr>
-        <p:txBody>
-          <a:bodyPr/>
-          <a:lstStyle/>
-          <a:p>
-            <a:endParaRPr lang="es-419" noProof="0" dirty="0"/>
-          </a:p>
-        </p:txBody>
-      </p:sp>
-      <p:sp>
-        <p:nvSpPr>
-          <p:cNvPr id="24" name="Shape 22"/>
-          <p:cNvSpPr/>
-          <p:nvPr/>
-        </p:nvSpPr>
-        <p:spPr>
-          <a:xfrm>
-            <a:off x="1874520" y="914400"/>
-            <a:ext cx="73152" cy="73152"/>
-          </a:xfrm>
-          <a:prstGeom prst="ellipse">
-            <a:avLst/>
-          </a:prstGeom>
-          <a:solidFill>
-            <a:srgbClr val="58A6FF">
-              <a:alpha val="30000"/>
-            </a:srgbClr>
-          </a:solidFill>
-          <a:ln/>
-        </p:spPr>
-        <p:txBody>
-          <a:bodyPr/>
-          <a:lstStyle/>
-          <a:p>
-            <a:endParaRPr lang="es-419" noProof="0" dirty="0"/>
-          </a:p>
-        </p:txBody>
-      </p:sp>
-      <p:sp>
-        <p:nvSpPr>
-          <p:cNvPr id="25" name="Shape 23"/>
-          <p:cNvSpPr/>
-          <p:nvPr/>
-        </p:nvSpPr>
-        <p:spPr>
-          <a:xfrm>
-            <a:off x="1874520" y="1234440"/>
-            <a:ext cx="73152" cy="73152"/>
-          </a:xfrm>
-          <a:prstGeom prst="ellipse">
-            <a:avLst/>
-          </a:prstGeom>
-          <a:solidFill>
-            <a:srgbClr val="58A6FF">
-              <a:alpha val="30000"/>
-            </a:srgbClr>
-          </a:solidFill>
-          <a:ln/>
-        </p:spPr>
-        <p:txBody>
-          <a:bodyPr/>
-          <a:lstStyle/>
-          <a:p>
-            <a:endParaRPr lang="es-419" noProof="0" dirty="0"/>
-          </a:p>
-        </p:txBody>
-      </p:sp>
-      <p:sp>
-        <p:nvSpPr>
-          <p:cNvPr id="26" name="Shape 24"/>
-          <p:cNvSpPr/>
-          <p:nvPr/>
-        </p:nvSpPr>
-        <p:spPr>
-          <a:xfrm>
-            <a:off x="9079992" y="0"/>
-            <a:ext cx="64008" cy="5143500"/>
-          </a:xfrm>
-          <a:prstGeom prst="rect">
-            <a:avLst/>
-          </a:prstGeom>
-          <a:solidFill>
-            <a:srgbClr val="58A6FF"/>
-          </a:solidFill>
-          <a:ln/>
-        </p:spPr>
-        <p:txBody>
-          <a:bodyPr/>
-          <a:lstStyle/>
-          <a:p>
-            <a:endParaRPr lang="es-419" noProof="0" dirty="0"/>
-          </a:p>
-        </p:txBody>
-      </p:sp>
-      <p:pic>
-        <p:nvPicPr>
-          <p:cNvPr id="27" name="Image 0" descr="preencoded.png"/>
-          <p:cNvPicPr>
-            <a:picLocks noChangeAspect="1"/>
-          </p:cNvPicPr>
-          <p:nvPr/>
-        </p:nvPicPr>
-        <p:blipFill>
-          <a:blip r:embed="rId3"/>
-          <a:stretch>
-            <a:fillRect/>
-          </a:stretch>
-        </p:blipFill>
-        <p:spPr>
-          <a:xfrm>
-            <a:off x="3794760" y="548640"/>
-            <a:ext cx="1554480" cy="1554480"/>
-          </a:xfrm>
-          <a:prstGeom prst="rect">
-            <a:avLst/>
-          </a:prstGeom>
-        </p:spPr>
-      </p:pic>
-      <p:sp>
-        <p:nvSpPr>
-          <p:cNvPr id="28" name="Text 25"/>
-          <p:cNvSpPr/>
-          <p:nvPr/>
-        </p:nvSpPr>
-        <p:spPr>
-          <a:xfrm>
-            <a:off x="914400" y="2286000"/>
-            <a:ext cx="7315200" cy="457200"/>
-          </a:xfrm>
-          <a:prstGeom prst="rect">
-            <a:avLst/>
-          </a:prstGeom>
-          <a:noFill/>
-          <a:ln/>
-        </p:spPr>
-        <p:txBody>
-          <a:bodyPr wrap="square" lIns="0" tIns="0" rIns="0" bIns="0" rtlCol="0" anchor="ctr"/>
-          <a:lstStyle/>
-          <a:p>
-            <a:pPr marL="0" indent="0" algn="ctr">
-              <a:buNone/>
-            </a:pPr>
-            <a:r>
-              <a:rPr lang="es-419" sz="1400" i="1" noProof="0" dirty="0">
-                <a:solidFill>
-                  <a:srgbClr val="8B949E"/>
-                </a:solidFill>
-                <a:latin typeface="Calibri" pitchFamily="34" charset="0"/>
-                <a:ea typeface="Calibri" pitchFamily="34" charset="-122"/>
-                <a:cs typeface="Calibri" pitchFamily="34" charset="-120"/>
-              </a:rPr>
-              <a:t>En resumen</a:t>
-            </a:r>
-            <a:endParaRPr lang="es-419" sz="1400" noProof="0" dirty="0"/>
-          </a:p>
-        </p:txBody>
-      </p:sp>
-      <p:sp>
-        <p:nvSpPr>
-          <p:cNvPr id="29" name="Text 26"/>
-          <p:cNvSpPr/>
-          <p:nvPr/>
-        </p:nvSpPr>
-        <p:spPr>
-          <a:xfrm>
-            <a:off x="457200" y="2788920"/>
-            <a:ext cx="8229600" cy="1005840"/>
-          </a:xfrm>
-          <a:prstGeom prst="rect">
-            <a:avLst/>
-          </a:prstGeom>
-          <a:noFill/>
-          <a:ln/>
-        </p:spPr>
-        <p:txBody>
-          <a:bodyPr wrap="square" lIns="0" tIns="0" rIns="0" bIns="0" rtlCol="0" anchor="ctr"/>
-          <a:lstStyle/>
-          <a:p>
-            <a:pPr marL="0" indent="0" algn="ctr">
-              <a:buNone/>
-            </a:pPr>
-            <a:r>
-              <a:rPr lang="es-419" sz="3600" b="1" noProof="0" dirty="0" err="1">
-                <a:solidFill>
-                  <a:srgbClr val="FFFFFF"/>
-                </a:solidFill>
-                <a:latin typeface="Calibri" pitchFamily="34" charset="0"/>
-                <a:ea typeface="Calibri" pitchFamily="34" charset="-122"/>
-                <a:cs typeface="Calibri" pitchFamily="34" charset="-120"/>
-              </a:rPr>
-              <a:t>Copilot</a:t>
-            </a:r>
-            <a:r>
-              <a:rPr lang="es-419" sz="3600" b="1" noProof="0" dirty="0">
-                <a:solidFill>
-                  <a:srgbClr val="FFFFFF"/>
-                </a:solidFill>
-                <a:latin typeface="Calibri" pitchFamily="34" charset="0"/>
-                <a:ea typeface="Calibri" pitchFamily="34" charset="-122"/>
-                <a:cs typeface="Calibri" pitchFamily="34" charset="-120"/>
-              </a:rPr>
-              <a:t> es una herramienta,</a:t>
-            </a:r>
-            <a:endParaRPr lang="es-419" sz="3600" noProof="0" dirty="0"/>
-          </a:p>
-          <a:p>
-            <a:pPr marL="0" indent="0" algn="ctr">
-              <a:buNone/>
-            </a:pPr>
-            <a:r>
-              <a:rPr lang="es-419" sz="3600" b="1" noProof="0" dirty="0">
-                <a:solidFill>
-                  <a:srgbClr val="FFFFFF"/>
-                </a:solidFill>
-                <a:latin typeface="Calibri" pitchFamily="34" charset="0"/>
-                <a:ea typeface="Calibri" pitchFamily="34" charset="-122"/>
-                <a:cs typeface="Calibri" pitchFamily="34" charset="-120"/>
-              </a:rPr>
-              <a:t>no un reemplazo.</a:t>
-            </a:r>
-            <a:endParaRPr lang="es-419" sz="3600" noProof="0" dirty="0"/>
-          </a:p>
-        </p:txBody>
-      </p:sp>
-      <p:sp>
-        <p:nvSpPr>
-          <p:cNvPr id="30" name="Shape 27"/>
-          <p:cNvSpPr/>
-          <p:nvPr/>
-        </p:nvSpPr>
-        <p:spPr>
-          <a:xfrm>
-            <a:off x="2743200" y="3913632"/>
-            <a:ext cx="3657600" cy="3658"/>
-          </a:xfrm>
-          <a:prstGeom prst="rect">
-            <a:avLst/>
-          </a:prstGeom>
-          <a:solidFill>
-            <a:srgbClr val="58A6FF"/>
-          </a:solidFill>
-          <a:ln/>
-        </p:spPr>
-        <p:txBody>
-          <a:bodyPr/>
-          <a:lstStyle/>
-          <a:p>
-            <a:endParaRPr lang="es-419" noProof="0" dirty="0"/>
-          </a:p>
-        </p:txBody>
-      </p:sp>
-      <p:sp>
-        <p:nvSpPr>
-          <p:cNvPr id="31" name="Text 28"/>
-          <p:cNvSpPr/>
-          <p:nvPr/>
-        </p:nvSpPr>
-        <p:spPr>
-          <a:xfrm>
-            <a:off x="914400" y="4005072"/>
-            <a:ext cx="7315200" cy="365760"/>
-          </a:xfrm>
-          <a:prstGeom prst="rect">
-            <a:avLst/>
-          </a:prstGeom>
-          <a:noFill/>
-          <a:ln/>
-        </p:spPr>
-        <p:txBody>
-          <a:bodyPr wrap="square" lIns="0" tIns="0" rIns="0" bIns="0" rtlCol="0" anchor="ctr"/>
-          <a:lstStyle/>
-          <a:p>
-            <a:pPr marL="0" indent="0" algn="ctr">
-              <a:buNone/>
-            </a:pPr>
-            <a:r>
-              <a:rPr lang="es-419" sz="1400" i="1" noProof="0" dirty="0">
-                <a:solidFill>
-                  <a:srgbClr val="58A6FF"/>
-                </a:solidFill>
-                <a:latin typeface="Calibri" pitchFamily="34" charset="0"/>
-                <a:ea typeface="Calibri" pitchFamily="34" charset="-122"/>
-                <a:cs typeface="Calibri" pitchFamily="34" charset="-120"/>
-              </a:rPr>
-              <a:t>El criterio técnico sigue siendo humano.</a:t>
-            </a:r>
-            <a:endParaRPr lang="es-419" sz="1400" noProof="0" dirty="0"/>
-          </a:p>
-        </p:txBody>
-      </p:sp>
-      <p:sp>
-        <p:nvSpPr>
-          <p:cNvPr id="32" name="Text 29"/>
-          <p:cNvSpPr/>
-          <p:nvPr/>
-        </p:nvSpPr>
-        <p:spPr>
-          <a:xfrm>
-            <a:off x="914400" y="4526280"/>
-            <a:ext cx="7315200" cy="320040"/>
-          </a:xfrm>
-          <a:prstGeom prst="rect">
-            <a:avLst/>
-          </a:prstGeom>
-          <a:noFill/>
-          <a:ln/>
-        </p:spPr>
-        <p:txBody>
-          <a:bodyPr wrap="square" lIns="0" tIns="0" rIns="0" bIns="0" rtlCol="0" anchor="ctr"/>
-          <a:lstStyle/>
-          <a:p>
-            <a:pPr marL="0" indent="0" algn="ctr">
-              <a:buNone/>
-            </a:pPr>
-            <a:r>
-              <a:rPr lang="es-419" sz="1000" noProof="0" dirty="0">
-                <a:solidFill>
-                  <a:srgbClr val="8B949E"/>
-                </a:solidFill>
-                <a:latin typeface="Calibri" pitchFamily="34" charset="0"/>
-                <a:ea typeface="Calibri" pitchFamily="34" charset="-122"/>
-                <a:cs typeface="Calibri" pitchFamily="34" charset="-120"/>
-              </a:rPr>
-              <a:t>Facultad de Ingeniería • Fundamentos de Ingeniería de Software</a:t>
-            </a:r>
-            <a:endParaRPr lang="es-419" sz="1000" noProof="0" dirty="0"/>
-          </a:p>
-        </p:txBody>
-      </p:sp>
-    </p:spTree>
   </p:cSld>
   <p:clrMapOvr>
     <a:masterClrMapping/>
@@ -10053,6 +10437,997 @@
         <p14:creationId xmlns:p14="http://schemas.microsoft.com/office/powerpoint/2010/main" val="1196182015"/>
       </p:ext>
     </p:extLst>
+  </p:cSld>
+  <p:clrMapOvr>
+    <a:masterClrMapping/>
+  </p:clrMapOvr>
+</p:sld>
+</file>
+
+<file path=ppt/slides/slide18.xml><?xml version="1.0" encoding="utf-8"?>
+<p:sld xmlns:a="http://schemas.openxmlformats.org/drawingml/2006/main" xmlns:r="http://schemas.openxmlformats.org/officeDocument/2006/relationships" xmlns:p="http://schemas.openxmlformats.org/presentationml/2006/main">
+  <p:cSld name="Slide 8">
+    <p:bg>
+      <p:bgPr>
+        <a:solidFill>
+          <a:srgbClr val="0D1117"/>
+        </a:solidFill>
+        <a:effectLst/>
+      </p:bgPr>
+    </p:bg>
+    <p:spTree>
+      <p:nvGrpSpPr>
+        <p:cNvPr id="1" name=""/>
+        <p:cNvGrpSpPr/>
+        <p:nvPr/>
+      </p:nvGrpSpPr>
+      <p:grpSpPr>
+        <a:xfrm>
+          <a:off x="0" y="0"/>
+          <a:ext cx="0" cy="0"/>
+          <a:chOff x="0" y="0"/>
+          <a:chExt cx="0" cy="0"/>
+        </a:xfrm>
+      </p:grpSpPr>
+      <p:sp>
+        <p:nvSpPr>
+          <p:cNvPr id="2" name="Shape 0"/>
+          <p:cNvSpPr/>
+          <p:nvPr/>
+        </p:nvSpPr>
+        <p:spPr>
+          <a:xfrm>
+            <a:off x="274320" y="274320"/>
+            <a:ext cx="73152" cy="73152"/>
+          </a:xfrm>
+          <a:prstGeom prst="ellipse">
+            <a:avLst/>
+          </a:prstGeom>
+          <a:solidFill>
+            <a:srgbClr val="58A6FF">
+              <a:alpha val="30000"/>
+            </a:srgbClr>
+          </a:solidFill>
+          <a:ln/>
+        </p:spPr>
+        <p:txBody>
+          <a:bodyPr/>
+          <a:lstStyle/>
+          <a:p>
+            <a:endParaRPr lang="es-419" noProof="0" dirty="0"/>
+          </a:p>
+        </p:txBody>
+      </p:sp>
+      <p:sp>
+        <p:nvSpPr>
+          <p:cNvPr id="3" name="Shape 1"/>
+          <p:cNvSpPr/>
+          <p:nvPr/>
+        </p:nvSpPr>
+        <p:spPr>
+          <a:xfrm>
+            <a:off x="274320" y="594360"/>
+            <a:ext cx="73152" cy="73152"/>
+          </a:xfrm>
+          <a:prstGeom prst="ellipse">
+            <a:avLst/>
+          </a:prstGeom>
+          <a:solidFill>
+            <a:srgbClr val="58A6FF">
+              <a:alpha val="30000"/>
+            </a:srgbClr>
+          </a:solidFill>
+          <a:ln/>
+        </p:spPr>
+        <p:txBody>
+          <a:bodyPr/>
+          <a:lstStyle/>
+          <a:p>
+            <a:endParaRPr lang="es-419" noProof="0" dirty="0"/>
+          </a:p>
+        </p:txBody>
+      </p:sp>
+      <p:sp>
+        <p:nvSpPr>
+          <p:cNvPr id="4" name="Shape 2"/>
+          <p:cNvSpPr/>
+          <p:nvPr/>
+        </p:nvSpPr>
+        <p:spPr>
+          <a:xfrm>
+            <a:off x="274320" y="914400"/>
+            <a:ext cx="73152" cy="73152"/>
+          </a:xfrm>
+          <a:prstGeom prst="ellipse">
+            <a:avLst/>
+          </a:prstGeom>
+          <a:solidFill>
+            <a:srgbClr val="58A6FF">
+              <a:alpha val="30000"/>
+            </a:srgbClr>
+          </a:solidFill>
+          <a:ln/>
+        </p:spPr>
+        <p:txBody>
+          <a:bodyPr/>
+          <a:lstStyle/>
+          <a:p>
+            <a:endParaRPr lang="es-419" noProof="0" dirty="0"/>
+          </a:p>
+        </p:txBody>
+      </p:sp>
+      <p:sp>
+        <p:nvSpPr>
+          <p:cNvPr id="5" name="Shape 3"/>
+          <p:cNvSpPr/>
+          <p:nvPr/>
+        </p:nvSpPr>
+        <p:spPr>
+          <a:xfrm>
+            <a:off x="274320" y="1234440"/>
+            <a:ext cx="73152" cy="73152"/>
+          </a:xfrm>
+          <a:prstGeom prst="ellipse">
+            <a:avLst/>
+          </a:prstGeom>
+          <a:solidFill>
+            <a:srgbClr val="58A6FF">
+              <a:alpha val="30000"/>
+            </a:srgbClr>
+          </a:solidFill>
+          <a:ln/>
+        </p:spPr>
+        <p:txBody>
+          <a:bodyPr/>
+          <a:lstStyle/>
+          <a:p>
+            <a:endParaRPr lang="es-419" noProof="0" dirty="0"/>
+          </a:p>
+        </p:txBody>
+      </p:sp>
+      <p:sp>
+        <p:nvSpPr>
+          <p:cNvPr id="6" name="Shape 4"/>
+          <p:cNvSpPr/>
+          <p:nvPr/>
+        </p:nvSpPr>
+        <p:spPr>
+          <a:xfrm>
+            <a:off x="594360" y="274320"/>
+            <a:ext cx="73152" cy="73152"/>
+          </a:xfrm>
+          <a:prstGeom prst="ellipse">
+            <a:avLst/>
+          </a:prstGeom>
+          <a:solidFill>
+            <a:srgbClr val="58A6FF">
+              <a:alpha val="30000"/>
+            </a:srgbClr>
+          </a:solidFill>
+          <a:ln/>
+        </p:spPr>
+        <p:txBody>
+          <a:bodyPr/>
+          <a:lstStyle/>
+          <a:p>
+            <a:endParaRPr lang="es-419" noProof="0" dirty="0"/>
+          </a:p>
+        </p:txBody>
+      </p:sp>
+      <p:sp>
+        <p:nvSpPr>
+          <p:cNvPr id="7" name="Shape 5"/>
+          <p:cNvSpPr/>
+          <p:nvPr/>
+        </p:nvSpPr>
+        <p:spPr>
+          <a:xfrm>
+            <a:off x="594360" y="594360"/>
+            <a:ext cx="73152" cy="73152"/>
+          </a:xfrm>
+          <a:prstGeom prst="ellipse">
+            <a:avLst/>
+          </a:prstGeom>
+          <a:solidFill>
+            <a:srgbClr val="58A6FF">
+              <a:alpha val="30000"/>
+            </a:srgbClr>
+          </a:solidFill>
+          <a:ln/>
+        </p:spPr>
+        <p:txBody>
+          <a:bodyPr/>
+          <a:lstStyle/>
+          <a:p>
+            <a:endParaRPr lang="es-419" noProof="0" dirty="0"/>
+          </a:p>
+        </p:txBody>
+      </p:sp>
+      <p:sp>
+        <p:nvSpPr>
+          <p:cNvPr id="8" name="Shape 6"/>
+          <p:cNvSpPr/>
+          <p:nvPr/>
+        </p:nvSpPr>
+        <p:spPr>
+          <a:xfrm>
+            <a:off x="594360" y="914400"/>
+            <a:ext cx="73152" cy="73152"/>
+          </a:xfrm>
+          <a:prstGeom prst="ellipse">
+            <a:avLst/>
+          </a:prstGeom>
+          <a:solidFill>
+            <a:srgbClr val="58A6FF">
+              <a:alpha val="30000"/>
+            </a:srgbClr>
+          </a:solidFill>
+          <a:ln/>
+        </p:spPr>
+        <p:txBody>
+          <a:bodyPr/>
+          <a:lstStyle/>
+          <a:p>
+            <a:endParaRPr lang="es-419" noProof="0" dirty="0"/>
+          </a:p>
+        </p:txBody>
+      </p:sp>
+      <p:sp>
+        <p:nvSpPr>
+          <p:cNvPr id="9" name="Shape 7"/>
+          <p:cNvSpPr/>
+          <p:nvPr/>
+        </p:nvSpPr>
+        <p:spPr>
+          <a:xfrm>
+            <a:off x="594360" y="1234440"/>
+            <a:ext cx="73152" cy="73152"/>
+          </a:xfrm>
+          <a:prstGeom prst="ellipse">
+            <a:avLst/>
+          </a:prstGeom>
+          <a:solidFill>
+            <a:srgbClr val="58A6FF">
+              <a:alpha val="30000"/>
+            </a:srgbClr>
+          </a:solidFill>
+          <a:ln/>
+        </p:spPr>
+        <p:txBody>
+          <a:bodyPr/>
+          <a:lstStyle/>
+          <a:p>
+            <a:endParaRPr lang="es-419" noProof="0" dirty="0"/>
+          </a:p>
+        </p:txBody>
+      </p:sp>
+      <p:sp>
+        <p:nvSpPr>
+          <p:cNvPr id="10" name="Shape 8"/>
+          <p:cNvSpPr/>
+          <p:nvPr/>
+        </p:nvSpPr>
+        <p:spPr>
+          <a:xfrm>
+            <a:off x="914400" y="274320"/>
+            <a:ext cx="73152" cy="73152"/>
+          </a:xfrm>
+          <a:prstGeom prst="ellipse">
+            <a:avLst/>
+          </a:prstGeom>
+          <a:solidFill>
+            <a:srgbClr val="58A6FF">
+              <a:alpha val="30000"/>
+            </a:srgbClr>
+          </a:solidFill>
+          <a:ln/>
+        </p:spPr>
+        <p:txBody>
+          <a:bodyPr/>
+          <a:lstStyle/>
+          <a:p>
+            <a:endParaRPr lang="es-419" noProof="0" dirty="0"/>
+          </a:p>
+        </p:txBody>
+      </p:sp>
+      <p:sp>
+        <p:nvSpPr>
+          <p:cNvPr id="11" name="Shape 9"/>
+          <p:cNvSpPr/>
+          <p:nvPr/>
+        </p:nvSpPr>
+        <p:spPr>
+          <a:xfrm>
+            <a:off x="914400" y="594360"/>
+            <a:ext cx="73152" cy="73152"/>
+          </a:xfrm>
+          <a:prstGeom prst="ellipse">
+            <a:avLst/>
+          </a:prstGeom>
+          <a:solidFill>
+            <a:srgbClr val="58A6FF">
+              <a:alpha val="30000"/>
+            </a:srgbClr>
+          </a:solidFill>
+          <a:ln/>
+        </p:spPr>
+        <p:txBody>
+          <a:bodyPr/>
+          <a:lstStyle/>
+          <a:p>
+            <a:endParaRPr lang="es-419" noProof="0" dirty="0"/>
+          </a:p>
+        </p:txBody>
+      </p:sp>
+      <p:sp>
+        <p:nvSpPr>
+          <p:cNvPr id="12" name="Shape 10"/>
+          <p:cNvSpPr/>
+          <p:nvPr/>
+        </p:nvSpPr>
+        <p:spPr>
+          <a:xfrm>
+            <a:off x="914400" y="914400"/>
+            <a:ext cx="73152" cy="73152"/>
+          </a:xfrm>
+          <a:prstGeom prst="ellipse">
+            <a:avLst/>
+          </a:prstGeom>
+          <a:solidFill>
+            <a:srgbClr val="58A6FF">
+              <a:alpha val="30000"/>
+            </a:srgbClr>
+          </a:solidFill>
+          <a:ln/>
+        </p:spPr>
+        <p:txBody>
+          <a:bodyPr/>
+          <a:lstStyle/>
+          <a:p>
+            <a:endParaRPr lang="es-419" noProof="0" dirty="0"/>
+          </a:p>
+        </p:txBody>
+      </p:sp>
+      <p:sp>
+        <p:nvSpPr>
+          <p:cNvPr id="13" name="Shape 11"/>
+          <p:cNvSpPr/>
+          <p:nvPr/>
+        </p:nvSpPr>
+        <p:spPr>
+          <a:xfrm>
+            <a:off x="914400" y="1234440"/>
+            <a:ext cx="73152" cy="73152"/>
+          </a:xfrm>
+          <a:prstGeom prst="ellipse">
+            <a:avLst/>
+          </a:prstGeom>
+          <a:solidFill>
+            <a:srgbClr val="58A6FF">
+              <a:alpha val="30000"/>
+            </a:srgbClr>
+          </a:solidFill>
+          <a:ln/>
+        </p:spPr>
+        <p:txBody>
+          <a:bodyPr/>
+          <a:lstStyle/>
+          <a:p>
+            <a:endParaRPr lang="es-419" noProof="0" dirty="0"/>
+          </a:p>
+        </p:txBody>
+      </p:sp>
+      <p:sp>
+        <p:nvSpPr>
+          <p:cNvPr id="14" name="Shape 12"/>
+          <p:cNvSpPr/>
+          <p:nvPr/>
+        </p:nvSpPr>
+        <p:spPr>
+          <a:xfrm>
+            <a:off x="1234440" y="274320"/>
+            <a:ext cx="73152" cy="73152"/>
+          </a:xfrm>
+          <a:prstGeom prst="ellipse">
+            <a:avLst/>
+          </a:prstGeom>
+          <a:solidFill>
+            <a:srgbClr val="58A6FF">
+              <a:alpha val="30000"/>
+            </a:srgbClr>
+          </a:solidFill>
+          <a:ln/>
+        </p:spPr>
+        <p:txBody>
+          <a:bodyPr/>
+          <a:lstStyle/>
+          <a:p>
+            <a:endParaRPr lang="es-419" noProof="0" dirty="0"/>
+          </a:p>
+        </p:txBody>
+      </p:sp>
+      <p:sp>
+        <p:nvSpPr>
+          <p:cNvPr id="15" name="Shape 13"/>
+          <p:cNvSpPr/>
+          <p:nvPr/>
+        </p:nvSpPr>
+        <p:spPr>
+          <a:xfrm>
+            <a:off x="1234440" y="594360"/>
+            <a:ext cx="73152" cy="73152"/>
+          </a:xfrm>
+          <a:prstGeom prst="ellipse">
+            <a:avLst/>
+          </a:prstGeom>
+          <a:solidFill>
+            <a:srgbClr val="58A6FF">
+              <a:alpha val="30000"/>
+            </a:srgbClr>
+          </a:solidFill>
+          <a:ln/>
+        </p:spPr>
+        <p:txBody>
+          <a:bodyPr/>
+          <a:lstStyle/>
+          <a:p>
+            <a:endParaRPr lang="es-419" noProof="0" dirty="0"/>
+          </a:p>
+        </p:txBody>
+      </p:sp>
+      <p:sp>
+        <p:nvSpPr>
+          <p:cNvPr id="16" name="Shape 14"/>
+          <p:cNvSpPr/>
+          <p:nvPr/>
+        </p:nvSpPr>
+        <p:spPr>
+          <a:xfrm>
+            <a:off x="1234440" y="914400"/>
+            <a:ext cx="73152" cy="73152"/>
+          </a:xfrm>
+          <a:prstGeom prst="ellipse">
+            <a:avLst/>
+          </a:prstGeom>
+          <a:solidFill>
+            <a:srgbClr val="58A6FF">
+              <a:alpha val="30000"/>
+            </a:srgbClr>
+          </a:solidFill>
+          <a:ln/>
+        </p:spPr>
+        <p:txBody>
+          <a:bodyPr/>
+          <a:lstStyle/>
+          <a:p>
+            <a:endParaRPr lang="es-419" noProof="0" dirty="0"/>
+          </a:p>
+        </p:txBody>
+      </p:sp>
+      <p:sp>
+        <p:nvSpPr>
+          <p:cNvPr id="17" name="Shape 15"/>
+          <p:cNvSpPr/>
+          <p:nvPr/>
+        </p:nvSpPr>
+        <p:spPr>
+          <a:xfrm>
+            <a:off x="1234440" y="1234440"/>
+            <a:ext cx="73152" cy="73152"/>
+          </a:xfrm>
+          <a:prstGeom prst="ellipse">
+            <a:avLst/>
+          </a:prstGeom>
+          <a:solidFill>
+            <a:srgbClr val="58A6FF">
+              <a:alpha val="30000"/>
+            </a:srgbClr>
+          </a:solidFill>
+          <a:ln/>
+        </p:spPr>
+        <p:txBody>
+          <a:bodyPr/>
+          <a:lstStyle/>
+          <a:p>
+            <a:endParaRPr lang="es-419" noProof="0" dirty="0"/>
+          </a:p>
+        </p:txBody>
+      </p:sp>
+      <p:sp>
+        <p:nvSpPr>
+          <p:cNvPr id="18" name="Shape 16"/>
+          <p:cNvSpPr/>
+          <p:nvPr/>
+        </p:nvSpPr>
+        <p:spPr>
+          <a:xfrm>
+            <a:off x="1554480" y="274320"/>
+            <a:ext cx="73152" cy="73152"/>
+          </a:xfrm>
+          <a:prstGeom prst="ellipse">
+            <a:avLst/>
+          </a:prstGeom>
+          <a:solidFill>
+            <a:srgbClr val="58A6FF">
+              <a:alpha val="30000"/>
+            </a:srgbClr>
+          </a:solidFill>
+          <a:ln/>
+        </p:spPr>
+        <p:txBody>
+          <a:bodyPr/>
+          <a:lstStyle/>
+          <a:p>
+            <a:endParaRPr lang="es-419" noProof="0" dirty="0"/>
+          </a:p>
+        </p:txBody>
+      </p:sp>
+      <p:sp>
+        <p:nvSpPr>
+          <p:cNvPr id="19" name="Shape 17"/>
+          <p:cNvSpPr/>
+          <p:nvPr/>
+        </p:nvSpPr>
+        <p:spPr>
+          <a:xfrm>
+            <a:off x="1554480" y="594360"/>
+            <a:ext cx="73152" cy="73152"/>
+          </a:xfrm>
+          <a:prstGeom prst="ellipse">
+            <a:avLst/>
+          </a:prstGeom>
+          <a:solidFill>
+            <a:srgbClr val="58A6FF">
+              <a:alpha val="30000"/>
+            </a:srgbClr>
+          </a:solidFill>
+          <a:ln/>
+        </p:spPr>
+        <p:txBody>
+          <a:bodyPr/>
+          <a:lstStyle/>
+          <a:p>
+            <a:endParaRPr lang="es-419" noProof="0" dirty="0"/>
+          </a:p>
+        </p:txBody>
+      </p:sp>
+      <p:sp>
+        <p:nvSpPr>
+          <p:cNvPr id="20" name="Shape 18"/>
+          <p:cNvSpPr/>
+          <p:nvPr/>
+        </p:nvSpPr>
+        <p:spPr>
+          <a:xfrm>
+            <a:off x="1554480" y="914400"/>
+            <a:ext cx="73152" cy="73152"/>
+          </a:xfrm>
+          <a:prstGeom prst="ellipse">
+            <a:avLst/>
+          </a:prstGeom>
+          <a:solidFill>
+            <a:srgbClr val="58A6FF">
+              <a:alpha val="30000"/>
+            </a:srgbClr>
+          </a:solidFill>
+          <a:ln/>
+        </p:spPr>
+        <p:txBody>
+          <a:bodyPr/>
+          <a:lstStyle/>
+          <a:p>
+            <a:endParaRPr lang="es-419" noProof="0" dirty="0"/>
+          </a:p>
+        </p:txBody>
+      </p:sp>
+      <p:sp>
+        <p:nvSpPr>
+          <p:cNvPr id="21" name="Shape 19"/>
+          <p:cNvSpPr/>
+          <p:nvPr/>
+        </p:nvSpPr>
+        <p:spPr>
+          <a:xfrm>
+            <a:off x="1554480" y="1234440"/>
+            <a:ext cx="73152" cy="73152"/>
+          </a:xfrm>
+          <a:prstGeom prst="ellipse">
+            <a:avLst/>
+          </a:prstGeom>
+          <a:solidFill>
+            <a:srgbClr val="58A6FF">
+              <a:alpha val="30000"/>
+            </a:srgbClr>
+          </a:solidFill>
+          <a:ln/>
+        </p:spPr>
+        <p:txBody>
+          <a:bodyPr/>
+          <a:lstStyle/>
+          <a:p>
+            <a:endParaRPr lang="es-419" noProof="0" dirty="0"/>
+          </a:p>
+        </p:txBody>
+      </p:sp>
+      <p:sp>
+        <p:nvSpPr>
+          <p:cNvPr id="22" name="Shape 20"/>
+          <p:cNvSpPr/>
+          <p:nvPr/>
+        </p:nvSpPr>
+        <p:spPr>
+          <a:xfrm>
+            <a:off x="1874520" y="274320"/>
+            <a:ext cx="73152" cy="73152"/>
+          </a:xfrm>
+          <a:prstGeom prst="ellipse">
+            <a:avLst/>
+          </a:prstGeom>
+          <a:solidFill>
+            <a:srgbClr val="58A6FF">
+              <a:alpha val="30000"/>
+            </a:srgbClr>
+          </a:solidFill>
+          <a:ln/>
+        </p:spPr>
+        <p:txBody>
+          <a:bodyPr/>
+          <a:lstStyle/>
+          <a:p>
+            <a:endParaRPr lang="es-419" noProof="0" dirty="0"/>
+          </a:p>
+        </p:txBody>
+      </p:sp>
+      <p:sp>
+        <p:nvSpPr>
+          <p:cNvPr id="23" name="Shape 21"/>
+          <p:cNvSpPr/>
+          <p:nvPr/>
+        </p:nvSpPr>
+        <p:spPr>
+          <a:xfrm>
+            <a:off x="1874520" y="594360"/>
+            <a:ext cx="73152" cy="73152"/>
+          </a:xfrm>
+          <a:prstGeom prst="ellipse">
+            <a:avLst/>
+          </a:prstGeom>
+          <a:solidFill>
+            <a:srgbClr val="58A6FF">
+              <a:alpha val="30000"/>
+            </a:srgbClr>
+          </a:solidFill>
+          <a:ln/>
+        </p:spPr>
+        <p:txBody>
+          <a:bodyPr/>
+          <a:lstStyle/>
+          <a:p>
+            <a:endParaRPr lang="es-419" noProof="0" dirty="0"/>
+          </a:p>
+        </p:txBody>
+      </p:sp>
+      <p:sp>
+        <p:nvSpPr>
+          <p:cNvPr id="24" name="Shape 22"/>
+          <p:cNvSpPr/>
+          <p:nvPr/>
+        </p:nvSpPr>
+        <p:spPr>
+          <a:xfrm>
+            <a:off x="1874520" y="914400"/>
+            <a:ext cx="73152" cy="73152"/>
+          </a:xfrm>
+          <a:prstGeom prst="ellipse">
+            <a:avLst/>
+          </a:prstGeom>
+          <a:solidFill>
+            <a:srgbClr val="58A6FF">
+              <a:alpha val="30000"/>
+            </a:srgbClr>
+          </a:solidFill>
+          <a:ln/>
+        </p:spPr>
+        <p:txBody>
+          <a:bodyPr/>
+          <a:lstStyle/>
+          <a:p>
+            <a:endParaRPr lang="es-419" noProof="0" dirty="0"/>
+          </a:p>
+        </p:txBody>
+      </p:sp>
+      <p:sp>
+        <p:nvSpPr>
+          <p:cNvPr id="25" name="Shape 23"/>
+          <p:cNvSpPr/>
+          <p:nvPr/>
+        </p:nvSpPr>
+        <p:spPr>
+          <a:xfrm>
+            <a:off x="1874520" y="1234440"/>
+            <a:ext cx="73152" cy="73152"/>
+          </a:xfrm>
+          <a:prstGeom prst="ellipse">
+            <a:avLst/>
+          </a:prstGeom>
+          <a:solidFill>
+            <a:srgbClr val="58A6FF">
+              <a:alpha val="30000"/>
+            </a:srgbClr>
+          </a:solidFill>
+          <a:ln/>
+        </p:spPr>
+        <p:txBody>
+          <a:bodyPr/>
+          <a:lstStyle/>
+          <a:p>
+            <a:endParaRPr lang="es-419" noProof="0" dirty="0"/>
+          </a:p>
+        </p:txBody>
+      </p:sp>
+      <p:sp>
+        <p:nvSpPr>
+          <p:cNvPr id="26" name="Shape 24"/>
+          <p:cNvSpPr/>
+          <p:nvPr/>
+        </p:nvSpPr>
+        <p:spPr>
+          <a:xfrm>
+            <a:off x="9079992" y="0"/>
+            <a:ext cx="64008" cy="5143500"/>
+          </a:xfrm>
+          <a:prstGeom prst="rect">
+            <a:avLst/>
+          </a:prstGeom>
+          <a:solidFill>
+            <a:srgbClr val="58A6FF"/>
+          </a:solidFill>
+          <a:ln/>
+        </p:spPr>
+        <p:txBody>
+          <a:bodyPr/>
+          <a:lstStyle/>
+          <a:p>
+            <a:endParaRPr lang="es-419" noProof="0" dirty="0"/>
+          </a:p>
+        </p:txBody>
+      </p:sp>
+      <p:pic>
+        <p:nvPicPr>
+          <p:cNvPr id="27" name="Image 0" descr="preencoded.png"/>
+          <p:cNvPicPr>
+            <a:picLocks noChangeAspect="1"/>
+          </p:cNvPicPr>
+          <p:nvPr/>
+        </p:nvPicPr>
+        <p:blipFill>
+          <a:blip r:embed="rId3"/>
+          <a:stretch>
+            <a:fillRect/>
+          </a:stretch>
+        </p:blipFill>
+        <p:spPr>
+          <a:xfrm>
+            <a:off x="3794760" y="548640"/>
+            <a:ext cx="1554480" cy="1554480"/>
+          </a:xfrm>
+          <a:prstGeom prst="rect">
+            <a:avLst/>
+          </a:prstGeom>
+        </p:spPr>
+      </p:pic>
+      <p:sp>
+        <p:nvSpPr>
+          <p:cNvPr id="28" name="Text 25"/>
+          <p:cNvSpPr/>
+          <p:nvPr/>
+        </p:nvSpPr>
+        <p:spPr>
+          <a:xfrm>
+            <a:off x="914400" y="2286000"/>
+            <a:ext cx="7315200" cy="457200"/>
+          </a:xfrm>
+          <a:prstGeom prst="rect">
+            <a:avLst/>
+          </a:prstGeom>
+          <a:noFill/>
+          <a:ln/>
+        </p:spPr>
+        <p:txBody>
+          <a:bodyPr wrap="square" lIns="0" tIns="0" rIns="0" bIns="0" rtlCol="0" anchor="ctr"/>
+          <a:lstStyle/>
+          <a:p>
+            <a:pPr marL="0" indent="0" algn="ctr">
+              <a:buNone/>
+            </a:pPr>
+            <a:r>
+              <a:rPr lang="es-419" sz="1400" i="1" noProof="0" dirty="0">
+                <a:solidFill>
+                  <a:srgbClr val="8B949E"/>
+                </a:solidFill>
+                <a:latin typeface="Calibri" pitchFamily="34" charset="0"/>
+                <a:ea typeface="Calibri" pitchFamily="34" charset="-122"/>
+                <a:cs typeface="Calibri" pitchFamily="34" charset="-120"/>
+              </a:rPr>
+              <a:t>En resumen</a:t>
+            </a:r>
+            <a:endParaRPr lang="es-419" sz="1400" noProof="0" dirty="0"/>
+          </a:p>
+        </p:txBody>
+      </p:sp>
+      <p:sp>
+        <p:nvSpPr>
+          <p:cNvPr id="29" name="Text 26"/>
+          <p:cNvSpPr/>
+          <p:nvPr/>
+        </p:nvSpPr>
+        <p:spPr>
+          <a:xfrm>
+            <a:off x="457200" y="2788920"/>
+            <a:ext cx="8229600" cy="1005840"/>
+          </a:xfrm>
+          <a:prstGeom prst="rect">
+            <a:avLst/>
+          </a:prstGeom>
+          <a:noFill/>
+          <a:ln/>
+        </p:spPr>
+        <p:txBody>
+          <a:bodyPr wrap="square" lIns="0" tIns="0" rIns="0" bIns="0" rtlCol="0" anchor="ctr"/>
+          <a:lstStyle/>
+          <a:p>
+            <a:pPr marL="0" indent="0" algn="ctr">
+              <a:buNone/>
+            </a:pPr>
+            <a:r>
+              <a:rPr lang="es-419" sz="3600" b="1" noProof="0" dirty="0" err="1">
+                <a:solidFill>
+                  <a:srgbClr val="FFFFFF"/>
+                </a:solidFill>
+                <a:latin typeface="Calibri" pitchFamily="34" charset="0"/>
+                <a:ea typeface="Calibri" pitchFamily="34" charset="-122"/>
+                <a:cs typeface="Calibri" pitchFamily="34" charset="-120"/>
+              </a:rPr>
+              <a:t>Copilot</a:t>
+            </a:r>
+            <a:r>
+              <a:rPr lang="es-419" sz="3600" b="1" noProof="0" dirty="0">
+                <a:solidFill>
+                  <a:srgbClr val="FFFFFF"/>
+                </a:solidFill>
+                <a:latin typeface="Calibri" pitchFamily="34" charset="0"/>
+                <a:ea typeface="Calibri" pitchFamily="34" charset="-122"/>
+                <a:cs typeface="Calibri" pitchFamily="34" charset="-120"/>
+              </a:rPr>
+              <a:t> es una herramienta,</a:t>
+            </a:r>
+            <a:endParaRPr lang="es-419" sz="3600" noProof="0" dirty="0"/>
+          </a:p>
+          <a:p>
+            <a:pPr marL="0" indent="0" algn="ctr">
+              <a:buNone/>
+            </a:pPr>
+            <a:r>
+              <a:rPr lang="es-419" sz="3600" b="1" noProof="0" dirty="0">
+                <a:solidFill>
+                  <a:srgbClr val="FFFFFF"/>
+                </a:solidFill>
+                <a:latin typeface="Calibri" pitchFamily="34" charset="0"/>
+                <a:ea typeface="Calibri" pitchFamily="34" charset="-122"/>
+                <a:cs typeface="Calibri" pitchFamily="34" charset="-120"/>
+              </a:rPr>
+              <a:t>no un reemplazo.</a:t>
+            </a:r>
+            <a:endParaRPr lang="es-419" sz="3600" noProof="0" dirty="0"/>
+          </a:p>
+        </p:txBody>
+      </p:sp>
+      <p:sp>
+        <p:nvSpPr>
+          <p:cNvPr id="30" name="Shape 27"/>
+          <p:cNvSpPr/>
+          <p:nvPr/>
+        </p:nvSpPr>
+        <p:spPr>
+          <a:xfrm>
+            <a:off x="2743200" y="3913632"/>
+            <a:ext cx="3657600" cy="3658"/>
+          </a:xfrm>
+          <a:prstGeom prst="rect">
+            <a:avLst/>
+          </a:prstGeom>
+          <a:solidFill>
+            <a:srgbClr val="58A6FF"/>
+          </a:solidFill>
+          <a:ln/>
+        </p:spPr>
+        <p:txBody>
+          <a:bodyPr/>
+          <a:lstStyle/>
+          <a:p>
+            <a:endParaRPr lang="es-419" noProof="0" dirty="0"/>
+          </a:p>
+        </p:txBody>
+      </p:sp>
+      <p:sp>
+        <p:nvSpPr>
+          <p:cNvPr id="31" name="Text 28"/>
+          <p:cNvSpPr/>
+          <p:nvPr/>
+        </p:nvSpPr>
+        <p:spPr>
+          <a:xfrm>
+            <a:off x="914400" y="4005072"/>
+            <a:ext cx="7315200" cy="365760"/>
+          </a:xfrm>
+          <a:prstGeom prst="rect">
+            <a:avLst/>
+          </a:prstGeom>
+          <a:noFill/>
+          <a:ln/>
+        </p:spPr>
+        <p:txBody>
+          <a:bodyPr wrap="square" lIns="0" tIns="0" rIns="0" bIns="0" rtlCol="0" anchor="ctr"/>
+          <a:lstStyle/>
+          <a:p>
+            <a:pPr marL="0" indent="0" algn="ctr">
+              <a:buNone/>
+            </a:pPr>
+            <a:r>
+              <a:rPr lang="es-419" sz="1400" i="1" noProof="0" dirty="0">
+                <a:solidFill>
+                  <a:srgbClr val="58A6FF"/>
+                </a:solidFill>
+                <a:latin typeface="Calibri" pitchFamily="34" charset="0"/>
+                <a:ea typeface="Calibri" pitchFamily="34" charset="-122"/>
+                <a:cs typeface="Calibri" pitchFamily="34" charset="-120"/>
+              </a:rPr>
+              <a:t>El criterio técnico sigue siendo humano.</a:t>
+            </a:r>
+            <a:endParaRPr lang="es-419" sz="1400" noProof="0" dirty="0"/>
+          </a:p>
+        </p:txBody>
+      </p:sp>
+      <p:sp>
+        <p:nvSpPr>
+          <p:cNvPr id="32" name="Text 29"/>
+          <p:cNvSpPr/>
+          <p:nvPr/>
+        </p:nvSpPr>
+        <p:spPr>
+          <a:xfrm>
+            <a:off x="914400" y="4526280"/>
+            <a:ext cx="7315200" cy="320040"/>
+          </a:xfrm>
+          <a:prstGeom prst="rect">
+            <a:avLst/>
+          </a:prstGeom>
+          <a:noFill/>
+          <a:ln/>
+        </p:spPr>
+        <p:txBody>
+          <a:bodyPr wrap="square" lIns="0" tIns="0" rIns="0" bIns="0" rtlCol="0" anchor="ctr"/>
+          <a:lstStyle/>
+          <a:p>
+            <a:pPr marL="0" indent="0" algn="ctr">
+              <a:buNone/>
+            </a:pPr>
+            <a:r>
+              <a:rPr lang="es-419" sz="1000" noProof="0" dirty="0">
+                <a:solidFill>
+                  <a:srgbClr val="8B949E"/>
+                </a:solidFill>
+                <a:latin typeface="Calibri" pitchFamily="34" charset="0"/>
+                <a:ea typeface="Calibri" pitchFamily="34" charset="-122"/>
+                <a:cs typeface="Calibri" pitchFamily="34" charset="-120"/>
+              </a:rPr>
+              <a:t>Facultad de Ingeniería • Fundamentos de Ingeniería de Software</a:t>
+            </a:r>
+            <a:endParaRPr lang="es-419" sz="1000" noProof="0" dirty="0"/>
+          </a:p>
+        </p:txBody>
+      </p:sp>
+    </p:spTree>
   </p:cSld>
   <p:clrMapOvr>
     <a:masterClrMapping/>
@@ -15429,7 +16804,29 @@
                 <a:ea typeface="Calibri" pitchFamily="34" charset="-122"/>
                 <a:cs typeface="Calibri" pitchFamily="34" charset="-120"/>
               </a:rPr>
-              <a:t>Chat interactivo</a:t>
+              <a:t>Chat interactivo (lateral e </a:t>
+            </a:r>
+            <a:r>
+              <a:rPr lang="es-419" sz="1000" noProof="0" dirty="0" err="1">
+                <a:solidFill>
+                  <a:srgbClr val="BC8CFF"/>
+                </a:solidFill>
+                <a:latin typeface="Calibri" pitchFamily="34" charset="0"/>
+                <a:ea typeface="Calibri" pitchFamily="34" charset="-122"/>
+                <a:cs typeface="Calibri" pitchFamily="34" charset="-120"/>
+              </a:rPr>
+              <a:t>inline</a:t>
+            </a:r>
+            <a:r>
+              <a:rPr lang="es-419" sz="1000" noProof="0" dirty="0">
+                <a:solidFill>
+                  <a:srgbClr val="BC8CFF"/>
+                </a:solidFill>
+                <a:latin typeface="Calibri" pitchFamily="34" charset="0"/>
+                <a:ea typeface="Calibri" pitchFamily="34" charset="-122"/>
+                <a:cs typeface="Calibri" pitchFamily="34" charset="-120"/>
+              </a:rPr>
+              <a:t>)</a:t>
             </a:r>
             <a:endParaRPr lang="es-419" sz="1000" noProof="0" dirty="0"/>
           </a:p>
@@ -15952,7 +17349,7 @@
         </p:nvSpPr>
         <p:spPr>
           <a:xfrm>
-            <a:off x="4754880" y="1079364"/>
+            <a:off x="4752752" y="1060019"/>
             <a:ext cx="2011680" cy="3737184"/>
           </a:xfrm>
           <a:prstGeom prst="rect">

--- a/presentacion.pptx
+++ b/presentacion.pptx
@@ -6633,7 +6633,7 @@
         </p:nvSpPr>
         <p:spPr>
           <a:xfrm>
-            <a:off x="330669" y="2867356"/>
+            <a:off x="330669" y="2992969"/>
             <a:ext cx="4241331" cy="1507526"/>
           </a:xfrm>
           <a:prstGeom prst="rect">
@@ -6755,8 +6755,8 @@
         </p:nvSpPr>
         <p:spPr>
           <a:xfrm>
-            <a:off x="262520" y="1274921"/>
-            <a:ext cx="3055841" cy="1448730"/>
+            <a:off x="262520" y="974595"/>
+            <a:ext cx="4423780" cy="1171731"/>
           </a:xfrm>
           <a:prstGeom prst="rect">
             <a:avLst/>
@@ -6900,7 +6900,7 @@
         </p:nvSpPr>
         <p:spPr>
           <a:xfrm>
-            <a:off x="804780" y="969936"/>
+            <a:off x="1636296" y="739306"/>
             <a:ext cx="1630075" cy="307777"/>
           </a:xfrm>
           <a:prstGeom prst="rect">
@@ -7314,7 +7314,7 @@
         </p:nvSpPr>
         <p:spPr>
           <a:xfrm>
-            <a:off x="262520" y="4518588"/>
+            <a:off x="262520" y="4644201"/>
             <a:ext cx="4572000" cy="276999"/>
           </a:xfrm>
           <a:prstGeom prst="rect">
@@ -7377,7 +7377,7 @@
         </p:nvSpPr>
         <p:spPr>
           <a:xfrm>
-            <a:off x="433909" y="3041474"/>
+            <a:off x="433909" y="3167087"/>
             <a:ext cx="2540905" cy="705258"/>
           </a:xfrm>
           <a:prstGeom prst="rect">
@@ -7442,7 +7442,7 @@
         </p:blipFill>
         <p:spPr>
           <a:xfrm>
-            <a:off x="3169186" y="3016897"/>
+            <a:off x="3169186" y="3142510"/>
             <a:ext cx="1208443" cy="1208443"/>
           </a:xfrm>
           <a:prstGeom prst="rect">
@@ -7450,6 +7450,158 @@
           </a:prstGeom>
         </p:spPr>
       </p:pic>
+      <p:sp>
+        <p:nvSpPr>
+          <p:cNvPr id="6" name="CuadroTexto 5">
+            <a:extLst>
+              <a:ext uri="{FF2B5EF4-FFF2-40B4-BE49-F238E27FC236}">
+                <a16:creationId xmlns:a16="http://schemas.microsoft.com/office/drawing/2014/main" id="{3F54BAC2-B1AE-436C-3895-8B0AD863AE9E}"/>
+              </a:ext>
+            </a:extLst>
+          </p:cNvPr>
+          <p:cNvSpPr txBox="1"/>
+          <p:nvPr/>
+        </p:nvSpPr>
+        <p:spPr>
+          <a:xfrm>
+            <a:off x="1895163" y="1982255"/>
+            <a:ext cx="1630075" cy="307777"/>
+          </a:xfrm>
+          <a:prstGeom prst="rect">
+            <a:avLst/>
+          </a:prstGeom>
+          <a:noFill/>
+        </p:spPr>
+        <p:txBody>
+          <a:bodyPr wrap="square">
+            <a:spAutoFit/>
+          </a:bodyPr>
+          <a:lstStyle/>
+          <a:p>
+            <a:r>
+              <a:rPr lang="es-UY" sz="1400" b="1" noProof="0" dirty="0" err="1">
+                <a:solidFill>
+                  <a:srgbClr val="C9D1D9"/>
+                </a:solidFill>
+                <a:ea typeface="Calibri" pitchFamily="34" charset="-122"/>
+                <a:cs typeface="Calibri" pitchFamily="34" charset="-120"/>
+              </a:rPr>
+              <a:t>Inline</a:t>
+            </a:r>
+            <a:r>
+              <a:rPr lang="es-UY" sz="1400" b="1" noProof="0" dirty="0">
+                <a:solidFill>
+                  <a:srgbClr val="C9D1D9"/>
+                </a:solidFill>
+                <a:ea typeface="Calibri" pitchFamily="34" charset="-122"/>
+                <a:cs typeface="Calibri" pitchFamily="34" charset="-120"/>
+              </a:rPr>
+              <a:t> Chat</a:t>
+            </a:r>
+            <a:endParaRPr lang="es-419" sz="1400" b="1" noProof="0" dirty="0"/>
+          </a:p>
+        </p:txBody>
+      </p:sp>
+      <p:sp>
+        <p:nvSpPr>
+          <p:cNvPr id="7" name="CuadroTexto 6">
+            <a:extLst>
+              <a:ext uri="{FF2B5EF4-FFF2-40B4-BE49-F238E27FC236}">
+                <a16:creationId xmlns:a16="http://schemas.microsoft.com/office/drawing/2014/main" id="{DC6F888D-A72D-B8B1-1A36-AFBB7D872E55}"/>
+              </a:ext>
+            </a:extLst>
+          </p:cNvPr>
+          <p:cNvSpPr txBox="1"/>
+          <p:nvPr/>
+        </p:nvSpPr>
+        <p:spPr>
+          <a:xfrm>
+            <a:off x="262520" y="2235736"/>
+            <a:ext cx="4309480" cy="617733"/>
+          </a:xfrm>
+          <a:prstGeom prst="rect">
+            <a:avLst/>
+          </a:prstGeom>
+          <a:noFill/>
+        </p:spPr>
+        <p:txBody>
+          <a:bodyPr wrap="square">
+            <a:spAutoFit/>
+          </a:bodyPr>
+          <a:lstStyle/>
+          <a:p>
+            <a:pPr>
+              <a:lnSpc>
+                <a:spcPct val="150000"/>
+              </a:lnSpc>
+            </a:pPr>
+            <a:r>
+              <a:rPr lang="es-419" sz="1200" dirty="0">
+                <a:solidFill>
+                  <a:srgbClr val="C9D1D9"/>
+                </a:solidFill>
+                <a:latin typeface="Calibri" pitchFamily="34" charset="0"/>
+                <a:ea typeface="Calibri" pitchFamily="34" charset="-122"/>
+                <a:cs typeface="Calibri" pitchFamily="34" charset="-120"/>
+              </a:rPr>
+              <a:t>Para realizar consultas sobre una sección de código </a:t>
+            </a:r>
+            <a:r>
+              <a:rPr lang="es-419" sz="1200" dirty="0">
+                <a:highlight>
+                  <a:srgbClr val="C0C0C0"/>
+                </a:highlight>
+                <a:latin typeface="Calibri" pitchFamily="34" charset="0"/>
+                <a:ea typeface="Calibri" pitchFamily="34" charset="-122"/>
+                <a:cs typeface="Calibri" pitchFamily="34" charset="-120"/>
+              </a:rPr>
+              <a:t>CTRL + I </a:t>
+            </a:r>
+            <a:r>
+              <a:rPr lang="es-419" sz="1200" dirty="0">
+                <a:latin typeface="Calibri" pitchFamily="34" charset="0"/>
+                <a:ea typeface="Calibri" pitchFamily="34" charset="-122"/>
+                <a:cs typeface="Calibri" pitchFamily="34" charset="-120"/>
+              </a:rPr>
+              <a:t> </a:t>
+            </a:r>
+            <a:r>
+              <a:rPr lang="es-419" sz="1200" dirty="0">
+                <a:solidFill>
+                  <a:srgbClr val="C9D1D9"/>
+                </a:solidFill>
+                <a:latin typeface="Calibri" pitchFamily="34" charset="0"/>
+                <a:ea typeface="Calibri" pitchFamily="34" charset="-122"/>
+                <a:cs typeface="Calibri" pitchFamily="34" charset="-120"/>
+              </a:rPr>
+              <a:t>o Click derecho -&gt; </a:t>
+            </a:r>
+            <a:r>
+              <a:rPr lang="es-419" sz="1200" dirty="0" err="1">
+                <a:solidFill>
+                  <a:srgbClr val="C9D1D9"/>
+                </a:solidFill>
+                <a:latin typeface="Calibri" pitchFamily="34" charset="0"/>
+                <a:ea typeface="Calibri" pitchFamily="34" charset="-122"/>
+                <a:cs typeface="Calibri" pitchFamily="34" charset="-120"/>
+              </a:rPr>
+              <a:t>Inline</a:t>
+            </a:r>
+            <a:r>
+              <a:rPr lang="es-419" sz="1200" dirty="0">
+                <a:solidFill>
+                  <a:srgbClr val="C9D1D9"/>
+                </a:solidFill>
+                <a:latin typeface="Calibri" pitchFamily="34" charset="0"/>
+                <a:ea typeface="Calibri" pitchFamily="34" charset="-122"/>
+                <a:cs typeface="Calibri" pitchFamily="34" charset="-120"/>
+              </a:rPr>
+              <a:t> Chat</a:t>
+            </a:r>
+            <a:endParaRPr lang="es-419" sz="1200" noProof="0" dirty="0"/>
+          </a:p>
+        </p:txBody>
+      </p:sp>
     </p:spTree>
     <p:extLst>
       <p:ext uri="{BB962C8B-B14F-4D97-AF65-F5344CB8AC3E}">
